--- a/1404.pptx
+++ b/1404.pptx
@@ -15,6 +15,10 @@
     <p:sldId id="262" r:id="rId9"/>
     <p:sldId id="264" r:id="rId10"/>
     <p:sldId id="263" r:id="rId11"/>
+    <p:sldId id="266" r:id="rId12"/>
+    <p:sldId id="267" r:id="rId13"/>
+    <p:sldId id="268" r:id="rId14"/>
+    <p:sldId id="269" r:id="rId15"/>
   </p:sldIdLst>
   <p:sldSz cx="12192000" cy="6858000"/>
   <p:notesSz cx="6858000" cy="9144000"/>
@@ -3963,6 +3967,1153 @@
 </p:sld>
 </file>
 
+<file path=ppt/slides/slide11.xml><?xml version="1.0" encoding="utf-8"?>
+<p:sld xmlns:a="http://schemas.openxmlformats.org/drawingml/2006/main" xmlns:r="http://schemas.openxmlformats.org/officeDocument/2006/relationships" xmlns:p="http://schemas.openxmlformats.org/presentationml/2006/main">
+  <p:cSld>
+    <p:spTree>
+      <p:nvGrpSpPr>
+        <p:cNvPr id="1" name=""/>
+        <p:cNvGrpSpPr/>
+        <p:nvPr/>
+      </p:nvGrpSpPr>
+      <p:grpSpPr>
+        <a:xfrm>
+          <a:off x="0" y="0"/>
+          <a:ext cx="0" cy="0"/>
+          <a:chOff x="0" y="0"/>
+          <a:chExt cx="0" cy="0"/>
+        </a:xfrm>
+      </p:grpSpPr>
+      <p:sp>
+        <p:nvSpPr>
+          <p:cNvPr id="4" name="CasellaDiTesto 3">
+            <a:extLst>
+              <a:ext uri="{FF2B5EF4-FFF2-40B4-BE49-F238E27FC236}">
+                <a16:creationId xmlns:a16="http://schemas.microsoft.com/office/drawing/2014/main" id="{A4BFC01A-69CA-D12E-4C7E-243048D2C40D}"/>
+              </a:ext>
+            </a:extLst>
+          </p:cNvPr>
+          <p:cNvSpPr txBox="1"/>
+          <p:nvPr/>
+        </p:nvSpPr>
+        <p:spPr>
+          <a:xfrm>
+            <a:off x="871870" y="526312"/>
+            <a:ext cx="6289158" cy="5355312"/>
+          </a:xfrm>
+          <a:prstGeom prst="rect">
+            <a:avLst/>
+          </a:prstGeom>
+          <a:noFill/>
+        </p:spPr>
+        <p:txBody>
+          <a:bodyPr wrap="square" rtlCol="0">
+            <a:spAutoFit/>
+          </a:bodyPr>
+          <a:lstStyle/>
+          <a:p>
+            <a:r>
+              <a:rPr lang="it-IT" dirty="0"/>
+              <a:t>Costrutto </a:t>
+            </a:r>
+            <a:r>
+              <a:rPr lang="it-IT" dirty="0" err="1"/>
+              <a:t>if</a:t>
+            </a:r>
+            <a:r>
+              <a:rPr lang="it-IT" dirty="0"/>
+              <a:t>:</a:t>
+            </a:r>
+          </a:p>
+          <a:p>
+            <a:endParaRPr lang="it-IT" dirty="0"/>
+          </a:p>
+          <a:p>
+            <a:endParaRPr lang="it-IT" dirty="0"/>
+          </a:p>
+          <a:p>
+            <a:r>
+              <a:rPr lang="it-IT" dirty="0" err="1"/>
+              <a:t>If</a:t>
+            </a:r>
+            <a:r>
+              <a:rPr lang="it-IT" dirty="0"/>
+              <a:t> (condizione/i){   (OBBLIGATORIO – CODICE SE VERO)</a:t>
+            </a:r>
+          </a:p>
+          <a:p>
+            <a:r>
+              <a:rPr lang="it-IT" dirty="0"/>
+              <a:t>	---- istruzioni se vero</a:t>
+            </a:r>
+          </a:p>
+          <a:p>
+            <a:r>
+              <a:rPr lang="it-IT" dirty="0"/>
+              <a:t>	----</a:t>
+            </a:r>
+          </a:p>
+          <a:p>
+            <a:r>
+              <a:rPr lang="it-IT" dirty="0"/>
+              <a:t>}</a:t>
+            </a:r>
+          </a:p>
+          <a:p>
+            <a:r>
+              <a:rPr lang="it-IT" dirty="0"/>
+              <a:t>Else </a:t>
+            </a:r>
+            <a:r>
+              <a:rPr lang="it-IT" dirty="0" err="1"/>
+              <a:t>if</a:t>
+            </a:r>
+            <a:r>
+              <a:rPr lang="it-IT" dirty="0"/>
+              <a:t> (condizione/i){	(FACOLTATIVO)</a:t>
+            </a:r>
+          </a:p>
+          <a:p>
+            <a:r>
+              <a:rPr lang="it-IT" dirty="0"/>
+              <a:t>	--</a:t>
+            </a:r>
+          </a:p>
+          <a:p>
+            <a:r>
+              <a:rPr lang="it-IT" dirty="0"/>
+              <a:t>}</a:t>
+            </a:r>
+          </a:p>
+          <a:p>
+            <a:r>
+              <a:rPr lang="it-IT" dirty="0"/>
+              <a:t>Else </a:t>
+            </a:r>
+            <a:r>
+              <a:rPr lang="it-IT" dirty="0" err="1"/>
+              <a:t>if</a:t>
+            </a:r>
+            <a:r>
+              <a:rPr lang="it-IT" dirty="0"/>
+              <a:t> (condizione/i){	(FACOLTATIVO)</a:t>
+            </a:r>
+          </a:p>
+          <a:p>
+            <a:r>
+              <a:rPr lang="it-IT" dirty="0"/>
+              <a:t>	---</a:t>
+            </a:r>
+          </a:p>
+          <a:p>
+            <a:r>
+              <a:rPr lang="it-IT" dirty="0"/>
+              <a:t>	---</a:t>
+            </a:r>
+          </a:p>
+          <a:p>
+            <a:r>
+              <a:rPr lang="it-IT" dirty="0"/>
+              <a:t>}</a:t>
+            </a:r>
+          </a:p>
+          <a:p>
+            <a:r>
+              <a:rPr lang="it-IT" dirty="0"/>
+              <a:t>Else  (FACOLTATIVO)</a:t>
+            </a:r>
+          </a:p>
+          <a:p>
+            <a:r>
+              <a:rPr lang="it-IT" dirty="0"/>
+              <a:t>{</a:t>
+            </a:r>
+          </a:p>
+          <a:p>
+            <a:r>
+              <a:rPr lang="it-IT" dirty="0"/>
+              <a:t>	---istruzione se falso</a:t>
+            </a:r>
+          </a:p>
+          <a:p>
+            <a:r>
+              <a:rPr lang="it-IT" dirty="0"/>
+              <a:t>	---</a:t>
+            </a:r>
+          </a:p>
+          <a:p>
+            <a:r>
+              <a:rPr lang="it-IT" dirty="0"/>
+              <a:t>}</a:t>
+            </a:r>
+          </a:p>
+        </p:txBody>
+      </p:sp>
+    </p:spTree>
+    <p:extLst>
+      <p:ext uri="{BB962C8B-B14F-4D97-AF65-F5344CB8AC3E}">
+        <p14:creationId xmlns:p14="http://schemas.microsoft.com/office/powerpoint/2010/main" val="2518502847"/>
+      </p:ext>
+    </p:extLst>
+  </p:cSld>
+  <p:clrMapOvr>
+    <a:masterClrMapping/>
+  </p:clrMapOvr>
+</p:sld>
+</file>
+
+<file path=ppt/slides/slide12.xml><?xml version="1.0" encoding="utf-8"?>
+<p:sld xmlns:a="http://schemas.openxmlformats.org/drawingml/2006/main" xmlns:r="http://schemas.openxmlformats.org/officeDocument/2006/relationships" xmlns:p="http://schemas.openxmlformats.org/presentationml/2006/main">
+  <p:cSld>
+    <p:spTree>
+      <p:nvGrpSpPr>
+        <p:cNvPr id="1" name=""/>
+        <p:cNvGrpSpPr/>
+        <p:nvPr/>
+      </p:nvGrpSpPr>
+      <p:grpSpPr>
+        <a:xfrm>
+          <a:off x="0" y="0"/>
+          <a:ext cx="0" cy="0"/>
+          <a:chOff x="0" y="0"/>
+          <a:chExt cx="0" cy="0"/>
+        </a:xfrm>
+      </p:grpSpPr>
+      <p:sp>
+        <p:nvSpPr>
+          <p:cNvPr id="4" name="CasellaDiTesto 3">
+            <a:extLst>
+              <a:ext uri="{FF2B5EF4-FFF2-40B4-BE49-F238E27FC236}">
+                <a16:creationId xmlns:a16="http://schemas.microsoft.com/office/drawing/2014/main" id="{0AF529C7-0E08-974D-4C01-BCA996B214DE}"/>
+              </a:ext>
+            </a:extLst>
+          </p:cNvPr>
+          <p:cNvSpPr txBox="1"/>
+          <p:nvPr/>
+        </p:nvSpPr>
+        <p:spPr>
+          <a:xfrm>
+            <a:off x="723014" y="441251"/>
+            <a:ext cx="3349256" cy="369332"/>
+          </a:xfrm>
+          <a:prstGeom prst="rect">
+            <a:avLst/>
+          </a:prstGeom>
+          <a:noFill/>
+        </p:spPr>
+        <p:txBody>
+          <a:bodyPr wrap="square" rtlCol="0">
+            <a:spAutoFit/>
+          </a:bodyPr>
+          <a:lstStyle/>
+          <a:p>
+            <a:r>
+              <a:rPr lang="it-IT" dirty="0"/>
+              <a:t>CONDIZIONE:</a:t>
+            </a:r>
+          </a:p>
+        </p:txBody>
+      </p:sp>
+      <p:sp>
+        <p:nvSpPr>
+          <p:cNvPr id="5" name="CasellaDiTesto 4">
+            <a:extLst>
+              <a:ext uri="{FF2B5EF4-FFF2-40B4-BE49-F238E27FC236}">
+                <a16:creationId xmlns:a16="http://schemas.microsoft.com/office/drawing/2014/main" id="{CEC1CA26-C6AB-50EE-0491-C888D16B6C70}"/>
+              </a:ext>
+            </a:extLst>
+          </p:cNvPr>
+          <p:cNvSpPr txBox="1"/>
+          <p:nvPr/>
+        </p:nvSpPr>
+        <p:spPr>
+          <a:xfrm>
+            <a:off x="919716" y="1520456"/>
+            <a:ext cx="9968024" cy="369332"/>
+          </a:xfrm>
+          <a:prstGeom prst="rect">
+            <a:avLst/>
+          </a:prstGeom>
+          <a:noFill/>
+        </p:spPr>
+        <p:txBody>
+          <a:bodyPr wrap="square" rtlCol="0">
+            <a:spAutoFit/>
+          </a:bodyPr>
+          <a:lstStyle/>
+          <a:p>
+            <a:r>
+              <a:rPr lang="it-IT" u="sng" dirty="0"/>
+              <a:t>NOMEVARIABILEDACONTROLLARE</a:t>
+            </a:r>
+            <a:r>
+              <a:rPr lang="it-IT" dirty="0"/>
+              <a:t>		OPERATORE DI CONFRONTO	VALORE</a:t>
+            </a:r>
+          </a:p>
+        </p:txBody>
+      </p:sp>
+      <p:sp>
+        <p:nvSpPr>
+          <p:cNvPr id="6" name="CasellaDiTesto 5">
+            <a:extLst>
+              <a:ext uri="{FF2B5EF4-FFF2-40B4-BE49-F238E27FC236}">
+                <a16:creationId xmlns:a16="http://schemas.microsoft.com/office/drawing/2014/main" id="{FE38F308-8715-4390-8BE4-8276D5D8AEE9}"/>
+              </a:ext>
+            </a:extLst>
+          </p:cNvPr>
+          <p:cNvSpPr txBox="1"/>
+          <p:nvPr/>
+        </p:nvSpPr>
+        <p:spPr>
+          <a:xfrm>
+            <a:off x="6560288" y="2200940"/>
+            <a:ext cx="1834117" cy="1754326"/>
+          </a:xfrm>
+          <a:prstGeom prst="rect">
+            <a:avLst/>
+          </a:prstGeom>
+          <a:noFill/>
+        </p:spPr>
+        <p:txBody>
+          <a:bodyPr wrap="square" rtlCol="0">
+            <a:spAutoFit/>
+          </a:bodyPr>
+          <a:lstStyle/>
+          <a:p>
+            <a:r>
+              <a:rPr lang="it-IT" dirty="0"/>
+              <a:t>&gt;</a:t>
+            </a:r>
+          </a:p>
+          <a:p>
+            <a:r>
+              <a:rPr lang="it-IT" dirty="0"/>
+              <a:t>&lt;</a:t>
+            </a:r>
+          </a:p>
+          <a:p>
+            <a:r>
+              <a:rPr lang="it-IT" dirty="0"/>
+              <a:t>&gt;=</a:t>
+            </a:r>
+          </a:p>
+          <a:p>
+            <a:r>
+              <a:rPr lang="it-IT" dirty="0"/>
+              <a:t>&lt;=</a:t>
+            </a:r>
+          </a:p>
+          <a:p>
+            <a:r>
+              <a:rPr lang="it-IT" dirty="0"/>
+              <a:t>!=  (diverso)</a:t>
+            </a:r>
+          </a:p>
+          <a:p>
+            <a:r>
+              <a:rPr lang="it-IT" dirty="0"/>
+              <a:t>== (uguale)</a:t>
+            </a:r>
+          </a:p>
+        </p:txBody>
+      </p:sp>
+      <p:sp>
+        <p:nvSpPr>
+          <p:cNvPr id="7" name="CasellaDiTesto 6">
+            <a:extLst>
+              <a:ext uri="{FF2B5EF4-FFF2-40B4-BE49-F238E27FC236}">
+                <a16:creationId xmlns:a16="http://schemas.microsoft.com/office/drawing/2014/main" id="{8C1B337A-C91A-AE7F-2D5F-DC7C97319FAA}"/>
+              </a:ext>
+            </a:extLst>
+          </p:cNvPr>
+          <p:cNvSpPr txBox="1"/>
+          <p:nvPr/>
+        </p:nvSpPr>
+        <p:spPr>
+          <a:xfrm>
+            <a:off x="8973879" y="2860158"/>
+            <a:ext cx="1648047" cy="923330"/>
+          </a:xfrm>
+          <a:prstGeom prst="rect">
+            <a:avLst/>
+          </a:prstGeom>
+          <a:noFill/>
+        </p:spPr>
+        <p:txBody>
+          <a:bodyPr wrap="square" rtlCol="0">
+            <a:spAutoFit/>
+          </a:bodyPr>
+          <a:lstStyle/>
+          <a:p>
+            <a:r>
+              <a:rPr lang="it-IT" dirty="0"/>
+              <a:t>1500</a:t>
+            </a:r>
+          </a:p>
+          <a:p>
+            <a:r>
+              <a:rPr lang="it-IT" dirty="0"/>
+              <a:t>25000</a:t>
+            </a:r>
+          </a:p>
+          <a:p>
+            <a:endParaRPr lang="it-IT" dirty="0"/>
+          </a:p>
+        </p:txBody>
+      </p:sp>
+      <p:sp>
+        <p:nvSpPr>
+          <p:cNvPr id="8" name="CasellaDiTesto 7">
+            <a:extLst>
+              <a:ext uri="{FF2B5EF4-FFF2-40B4-BE49-F238E27FC236}">
+                <a16:creationId xmlns:a16="http://schemas.microsoft.com/office/drawing/2014/main" id="{B05B8C8B-6D23-11F3-7187-F64D54ED7506}"/>
+              </a:ext>
+            </a:extLst>
+          </p:cNvPr>
+          <p:cNvSpPr txBox="1"/>
+          <p:nvPr/>
+        </p:nvSpPr>
+        <p:spPr>
+          <a:xfrm>
+            <a:off x="6379534" y="4194544"/>
+            <a:ext cx="3572540" cy="646331"/>
+          </a:xfrm>
+          <a:prstGeom prst="rect">
+            <a:avLst/>
+          </a:prstGeom>
+          <a:noFill/>
+        </p:spPr>
+        <p:txBody>
+          <a:bodyPr wrap="square" rtlCol="0">
+            <a:spAutoFit/>
+          </a:bodyPr>
+          <a:lstStyle/>
+          <a:p>
+            <a:r>
+              <a:rPr lang="it-IT" dirty="0"/>
+              <a:t>Stringhe:</a:t>
+            </a:r>
+          </a:p>
+          <a:p>
+            <a:r>
+              <a:rPr lang="it-IT" dirty="0"/>
+              <a:t>.</a:t>
+            </a:r>
+            <a:r>
+              <a:rPr lang="it-IT" dirty="0" err="1"/>
+              <a:t>equals</a:t>
+            </a:r>
+            <a:r>
+              <a:rPr lang="it-IT" dirty="0"/>
+              <a:t>(‘’valore da confrontare’’)</a:t>
+            </a:r>
+          </a:p>
+        </p:txBody>
+      </p:sp>
+    </p:spTree>
+    <p:extLst>
+      <p:ext uri="{BB962C8B-B14F-4D97-AF65-F5344CB8AC3E}">
+        <p14:creationId xmlns:p14="http://schemas.microsoft.com/office/powerpoint/2010/main" val="981040685"/>
+      </p:ext>
+    </p:extLst>
+  </p:cSld>
+  <p:clrMapOvr>
+    <a:masterClrMapping/>
+  </p:clrMapOvr>
+</p:sld>
+</file>
+
+<file path=ppt/slides/slide13.xml><?xml version="1.0" encoding="utf-8"?>
+<p:sld xmlns:a="http://schemas.openxmlformats.org/drawingml/2006/main" xmlns:r="http://schemas.openxmlformats.org/officeDocument/2006/relationships" xmlns:p="http://schemas.openxmlformats.org/presentationml/2006/main">
+  <p:cSld>
+    <p:spTree>
+      <p:nvGrpSpPr>
+        <p:cNvPr id="1" name=""/>
+        <p:cNvGrpSpPr/>
+        <p:nvPr/>
+      </p:nvGrpSpPr>
+      <p:grpSpPr>
+        <a:xfrm>
+          <a:off x="0" y="0"/>
+          <a:ext cx="0" cy="0"/>
+          <a:chOff x="0" y="0"/>
+          <a:chExt cx="0" cy="0"/>
+        </a:xfrm>
+      </p:grpSpPr>
+    </p:spTree>
+    <p:extLst>
+      <p:ext uri="{BB962C8B-B14F-4D97-AF65-F5344CB8AC3E}">
+        <p14:creationId xmlns:p14="http://schemas.microsoft.com/office/powerpoint/2010/main" val="4064229652"/>
+      </p:ext>
+    </p:extLst>
+  </p:cSld>
+  <p:clrMapOvr>
+    <a:masterClrMapping/>
+  </p:clrMapOvr>
+</p:sld>
+</file>
+
+<file path=ppt/slides/slide14.xml><?xml version="1.0" encoding="utf-8"?>
+<p:sld xmlns:a="http://schemas.openxmlformats.org/drawingml/2006/main" xmlns:r="http://schemas.openxmlformats.org/officeDocument/2006/relationships" xmlns:p="http://schemas.openxmlformats.org/presentationml/2006/main">
+  <p:cSld>
+    <p:spTree>
+      <p:nvGrpSpPr>
+        <p:cNvPr id="1" name="">
+          <a:extLst>
+            <a:ext uri="{FF2B5EF4-FFF2-40B4-BE49-F238E27FC236}">
+              <a16:creationId xmlns:a16="http://schemas.microsoft.com/office/drawing/2014/main" id="{D6DD405F-9C22-A6D4-B8FB-3F45C64BCECB}"/>
+            </a:ext>
+          </a:extLst>
+        </p:cNvPr>
+        <p:cNvGrpSpPr/>
+        <p:nvPr/>
+      </p:nvGrpSpPr>
+      <p:grpSpPr>
+        <a:xfrm>
+          <a:off x="0" y="0"/>
+          <a:ext cx="0" cy="0"/>
+          <a:chOff x="0" y="0"/>
+          <a:chExt cx="0" cy="0"/>
+        </a:xfrm>
+      </p:grpSpPr>
+      <p:sp>
+        <p:nvSpPr>
+          <p:cNvPr id="4" name="CasellaDiTesto 3">
+            <a:extLst>
+              <a:ext uri="{FF2B5EF4-FFF2-40B4-BE49-F238E27FC236}">
+                <a16:creationId xmlns:a16="http://schemas.microsoft.com/office/drawing/2014/main" id="{DF987E50-E9C1-152D-B4EF-DE8076DD8062}"/>
+              </a:ext>
+            </a:extLst>
+          </p:cNvPr>
+          <p:cNvSpPr txBox="1"/>
+          <p:nvPr/>
+        </p:nvSpPr>
+        <p:spPr>
+          <a:xfrm>
+            <a:off x="701749" y="329609"/>
+            <a:ext cx="1908544" cy="369332"/>
+          </a:xfrm>
+          <a:prstGeom prst="rect">
+            <a:avLst/>
+          </a:prstGeom>
+          <a:noFill/>
+        </p:spPr>
+        <p:txBody>
+          <a:bodyPr wrap="square" rtlCol="0">
+            <a:spAutoFit/>
+          </a:bodyPr>
+          <a:lstStyle/>
+          <a:p>
+            <a:r>
+              <a:rPr lang="it-IT" dirty="0"/>
+              <a:t>Progetto: fatture</a:t>
+            </a:r>
+          </a:p>
+        </p:txBody>
+      </p:sp>
+      <p:sp>
+        <p:nvSpPr>
+          <p:cNvPr id="5" name="CasellaDiTesto 4">
+            <a:extLst>
+              <a:ext uri="{FF2B5EF4-FFF2-40B4-BE49-F238E27FC236}">
+                <a16:creationId xmlns:a16="http://schemas.microsoft.com/office/drawing/2014/main" id="{DA1F768E-C17B-F4BD-A2CB-B216F7675FEE}"/>
+              </a:ext>
+            </a:extLst>
+          </p:cNvPr>
+          <p:cNvSpPr txBox="1"/>
+          <p:nvPr/>
+        </p:nvSpPr>
+        <p:spPr>
+          <a:xfrm>
+            <a:off x="802758" y="1137684"/>
+            <a:ext cx="1908544" cy="369332"/>
+          </a:xfrm>
+          <a:prstGeom prst="rect">
+            <a:avLst/>
+          </a:prstGeom>
+          <a:noFill/>
+        </p:spPr>
+        <p:txBody>
+          <a:bodyPr wrap="square" rtlCol="0">
+            <a:spAutoFit/>
+          </a:bodyPr>
+          <a:lstStyle/>
+          <a:p>
+            <a:r>
+              <a:rPr lang="it-IT" dirty="0"/>
+              <a:t>Importo unitario:</a:t>
+            </a:r>
+          </a:p>
+        </p:txBody>
+      </p:sp>
+      <p:sp>
+        <p:nvSpPr>
+          <p:cNvPr id="6" name="Rettangolo 5">
+            <a:extLst>
+              <a:ext uri="{FF2B5EF4-FFF2-40B4-BE49-F238E27FC236}">
+                <a16:creationId xmlns:a16="http://schemas.microsoft.com/office/drawing/2014/main" id="{9BBB2AC7-F8EC-C8D0-CA4F-FFE47D5FA920}"/>
+              </a:ext>
+            </a:extLst>
+          </p:cNvPr>
+          <p:cNvSpPr/>
+          <p:nvPr/>
+        </p:nvSpPr>
+        <p:spPr>
+          <a:xfrm>
+            <a:off x="2711302" y="1137684"/>
+            <a:ext cx="1855381" cy="369332"/>
+          </a:xfrm>
+          <a:prstGeom prst="rect">
+            <a:avLst/>
+          </a:prstGeom>
+        </p:spPr>
+        <p:style>
+          <a:lnRef idx="2">
+            <a:schemeClr val="accent1">
+              <a:shade val="15000"/>
+            </a:schemeClr>
+          </a:lnRef>
+          <a:fillRef idx="1">
+            <a:schemeClr val="accent1"/>
+          </a:fillRef>
+          <a:effectRef idx="0">
+            <a:schemeClr val="accent1"/>
+          </a:effectRef>
+          <a:fontRef idx="minor">
+            <a:schemeClr val="lt1"/>
+          </a:fontRef>
+        </p:style>
+        <p:txBody>
+          <a:bodyPr rtlCol="0" anchor="ctr"/>
+          <a:lstStyle/>
+          <a:p>
+            <a:pPr algn="ctr"/>
+            <a:endParaRPr lang="it-IT"/>
+          </a:p>
+        </p:txBody>
+      </p:sp>
+      <p:sp>
+        <p:nvSpPr>
+          <p:cNvPr id="7" name="CasellaDiTesto 6">
+            <a:extLst>
+              <a:ext uri="{FF2B5EF4-FFF2-40B4-BE49-F238E27FC236}">
+                <a16:creationId xmlns:a16="http://schemas.microsoft.com/office/drawing/2014/main" id="{6712BA6E-4E40-A7F8-3CE9-6DDE3D91D993}"/>
+              </a:ext>
+            </a:extLst>
+          </p:cNvPr>
+          <p:cNvSpPr txBox="1"/>
+          <p:nvPr/>
+        </p:nvSpPr>
+        <p:spPr>
+          <a:xfrm>
+            <a:off x="802758" y="1945759"/>
+            <a:ext cx="1908544" cy="369332"/>
+          </a:xfrm>
+          <a:prstGeom prst="rect">
+            <a:avLst/>
+          </a:prstGeom>
+          <a:noFill/>
+        </p:spPr>
+        <p:txBody>
+          <a:bodyPr wrap="square" rtlCol="0">
+            <a:spAutoFit/>
+          </a:bodyPr>
+          <a:lstStyle/>
+          <a:p>
+            <a:r>
+              <a:rPr lang="it-IT" dirty="0"/>
+              <a:t>Tipo prodotto:</a:t>
+            </a:r>
+          </a:p>
+        </p:txBody>
+      </p:sp>
+      <p:sp>
+        <p:nvSpPr>
+          <p:cNvPr id="8" name="Rettangolo 7">
+            <a:extLst>
+              <a:ext uri="{FF2B5EF4-FFF2-40B4-BE49-F238E27FC236}">
+                <a16:creationId xmlns:a16="http://schemas.microsoft.com/office/drawing/2014/main" id="{8388F89C-8B1C-E80E-DF46-C88703C6F2CF}"/>
+              </a:ext>
+            </a:extLst>
+          </p:cNvPr>
+          <p:cNvSpPr/>
+          <p:nvPr/>
+        </p:nvSpPr>
+        <p:spPr>
+          <a:xfrm>
+            <a:off x="2711302" y="1945759"/>
+            <a:ext cx="1855381" cy="369332"/>
+          </a:xfrm>
+          <a:prstGeom prst="rect">
+            <a:avLst/>
+          </a:prstGeom>
+        </p:spPr>
+        <p:style>
+          <a:lnRef idx="2">
+            <a:schemeClr val="accent1">
+              <a:shade val="15000"/>
+            </a:schemeClr>
+          </a:lnRef>
+          <a:fillRef idx="1">
+            <a:schemeClr val="accent1"/>
+          </a:fillRef>
+          <a:effectRef idx="0">
+            <a:schemeClr val="accent1"/>
+          </a:effectRef>
+          <a:fontRef idx="minor">
+            <a:schemeClr val="lt1"/>
+          </a:fontRef>
+        </p:style>
+        <p:txBody>
+          <a:bodyPr rtlCol="0" anchor="ctr"/>
+          <a:lstStyle/>
+          <a:p>
+            <a:pPr algn="ctr"/>
+            <a:endParaRPr lang="it-IT"/>
+          </a:p>
+        </p:txBody>
+      </p:sp>
+      <p:sp>
+        <p:nvSpPr>
+          <p:cNvPr id="9" name="Rettangolo con angoli arrotondati 8">
+            <a:extLst>
+              <a:ext uri="{FF2B5EF4-FFF2-40B4-BE49-F238E27FC236}">
+                <a16:creationId xmlns:a16="http://schemas.microsoft.com/office/drawing/2014/main" id="{70904331-C78F-3358-2FF6-B99552E4C1F1}"/>
+              </a:ext>
+            </a:extLst>
+          </p:cNvPr>
+          <p:cNvSpPr/>
+          <p:nvPr/>
+        </p:nvSpPr>
+        <p:spPr>
+          <a:xfrm>
+            <a:off x="882502" y="3072809"/>
+            <a:ext cx="3684181" cy="489100"/>
+          </a:xfrm>
+          <a:prstGeom prst="roundRect">
+            <a:avLst/>
+          </a:prstGeom>
+        </p:spPr>
+        <p:style>
+          <a:lnRef idx="2">
+            <a:schemeClr val="accent1">
+              <a:shade val="15000"/>
+            </a:schemeClr>
+          </a:lnRef>
+          <a:fillRef idx="1">
+            <a:schemeClr val="accent1"/>
+          </a:fillRef>
+          <a:effectRef idx="0">
+            <a:schemeClr val="accent1"/>
+          </a:effectRef>
+          <a:fontRef idx="minor">
+            <a:schemeClr val="lt1"/>
+          </a:fontRef>
+        </p:style>
+        <p:txBody>
+          <a:bodyPr rtlCol="0" anchor="ctr"/>
+          <a:lstStyle/>
+          <a:p>
+            <a:pPr algn="ctr"/>
+            <a:r>
+              <a:rPr lang="it-IT" dirty="0"/>
+              <a:t>Visualizza dati riepilogativi</a:t>
+            </a:r>
+          </a:p>
+        </p:txBody>
+      </p:sp>
+      <p:cxnSp>
+        <p:nvCxnSpPr>
+          <p:cNvPr id="11" name="Connettore 2 10">
+            <a:extLst>
+              <a:ext uri="{FF2B5EF4-FFF2-40B4-BE49-F238E27FC236}">
+                <a16:creationId xmlns:a16="http://schemas.microsoft.com/office/drawing/2014/main" id="{D64A66C1-3981-9055-D9A3-B43B4617464C}"/>
+              </a:ext>
+            </a:extLst>
+          </p:cNvPr>
+          <p:cNvCxnSpPr/>
+          <p:nvPr/>
+        </p:nvCxnSpPr>
+        <p:spPr>
+          <a:xfrm>
+            <a:off x="3125972" y="3429000"/>
+            <a:ext cx="457200" cy="1158949"/>
+          </a:xfrm>
+          <a:prstGeom prst="straightConnector1">
+            <a:avLst/>
+          </a:prstGeom>
+          <a:ln>
+            <a:tailEnd type="triangle"/>
+          </a:ln>
+        </p:spPr>
+        <p:style>
+          <a:lnRef idx="2">
+            <a:schemeClr val="accent1"/>
+          </a:lnRef>
+          <a:fillRef idx="0">
+            <a:schemeClr val="accent1"/>
+          </a:fillRef>
+          <a:effectRef idx="1">
+            <a:schemeClr val="accent1"/>
+          </a:effectRef>
+          <a:fontRef idx="minor">
+            <a:schemeClr val="tx1"/>
+          </a:fontRef>
+        </p:style>
+      </p:cxnSp>
+      <p:sp>
+        <p:nvSpPr>
+          <p:cNvPr id="12" name="CasellaDiTesto 11">
+            <a:extLst>
+              <a:ext uri="{FF2B5EF4-FFF2-40B4-BE49-F238E27FC236}">
+                <a16:creationId xmlns:a16="http://schemas.microsoft.com/office/drawing/2014/main" id="{8B2981D5-DEE0-595D-19EA-C4C8FFD8847A}"/>
+              </a:ext>
+            </a:extLst>
+          </p:cNvPr>
+          <p:cNvSpPr txBox="1"/>
+          <p:nvPr/>
+        </p:nvSpPr>
+        <p:spPr>
+          <a:xfrm>
+            <a:off x="3035596" y="4682685"/>
+            <a:ext cx="7958470" cy="369332"/>
+          </a:xfrm>
+          <a:prstGeom prst="rect">
+            <a:avLst/>
+          </a:prstGeom>
+          <a:noFill/>
+        </p:spPr>
+        <p:txBody>
+          <a:bodyPr wrap="square" rtlCol="0">
+            <a:spAutoFit/>
+          </a:bodyPr>
+          <a:lstStyle/>
+          <a:p>
+            <a:r>
+              <a:rPr lang="it-IT" dirty="0"/>
+              <a:t>Avendo acquistato un prodotto di tipo:           il saldo della fattura è: (calcolo)</a:t>
+            </a:r>
+          </a:p>
+        </p:txBody>
+      </p:sp>
+      <p:sp>
+        <p:nvSpPr>
+          <p:cNvPr id="2" name="CasellaDiTesto 1">
+            <a:extLst>
+              <a:ext uri="{FF2B5EF4-FFF2-40B4-BE49-F238E27FC236}">
+                <a16:creationId xmlns:a16="http://schemas.microsoft.com/office/drawing/2014/main" id="{6C40B058-BB9F-FA51-F24E-0B7B594BEA63}"/>
+              </a:ext>
+            </a:extLst>
+          </p:cNvPr>
+          <p:cNvSpPr txBox="1"/>
+          <p:nvPr/>
+        </p:nvSpPr>
+        <p:spPr>
+          <a:xfrm>
+            <a:off x="802758" y="2525382"/>
+            <a:ext cx="1908544" cy="369332"/>
+          </a:xfrm>
+          <a:prstGeom prst="rect">
+            <a:avLst/>
+          </a:prstGeom>
+          <a:noFill/>
+        </p:spPr>
+        <p:txBody>
+          <a:bodyPr wrap="square" rtlCol="0">
+            <a:spAutoFit/>
+          </a:bodyPr>
+          <a:lstStyle/>
+          <a:p>
+            <a:r>
+              <a:rPr lang="it-IT" dirty="0"/>
+              <a:t>Numero pezzi:</a:t>
+            </a:r>
+          </a:p>
+        </p:txBody>
+      </p:sp>
+      <p:sp>
+        <p:nvSpPr>
+          <p:cNvPr id="3" name="Rettangolo 2">
+            <a:extLst>
+              <a:ext uri="{FF2B5EF4-FFF2-40B4-BE49-F238E27FC236}">
+                <a16:creationId xmlns:a16="http://schemas.microsoft.com/office/drawing/2014/main" id="{BA58BAB6-8AF2-02B2-D75F-F0A6D123D576}"/>
+              </a:ext>
+            </a:extLst>
+          </p:cNvPr>
+          <p:cNvSpPr/>
+          <p:nvPr/>
+        </p:nvSpPr>
+        <p:spPr>
+          <a:xfrm>
+            <a:off x="2711302" y="2525382"/>
+            <a:ext cx="1855381" cy="369332"/>
+          </a:xfrm>
+          <a:prstGeom prst="rect">
+            <a:avLst/>
+          </a:prstGeom>
+        </p:spPr>
+        <p:style>
+          <a:lnRef idx="2">
+            <a:schemeClr val="accent1">
+              <a:shade val="15000"/>
+            </a:schemeClr>
+          </a:lnRef>
+          <a:fillRef idx="1">
+            <a:schemeClr val="accent1"/>
+          </a:fillRef>
+          <a:effectRef idx="0">
+            <a:schemeClr val="accent1"/>
+          </a:effectRef>
+          <a:fontRef idx="minor">
+            <a:schemeClr val="lt1"/>
+          </a:fontRef>
+        </p:style>
+        <p:txBody>
+          <a:bodyPr rtlCol="0" anchor="ctr"/>
+          <a:lstStyle/>
+          <a:p>
+            <a:pPr algn="ctr"/>
+            <a:endParaRPr lang="it-IT"/>
+          </a:p>
+        </p:txBody>
+      </p:sp>
+      <p:cxnSp>
+        <p:nvCxnSpPr>
+          <p:cNvPr id="13" name="Connettore 2 12">
+            <a:extLst>
+              <a:ext uri="{FF2B5EF4-FFF2-40B4-BE49-F238E27FC236}">
+                <a16:creationId xmlns:a16="http://schemas.microsoft.com/office/drawing/2014/main" id="{63F91CCC-B638-0B7E-7A66-3B6FCAD549D0}"/>
+              </a:ext>
+            </a:extLst>
+          </p:cNvPr>
+          <p:cNvCxnSpPr/>
+          <p:nvPr/>
+        </p:nvCxnSpPr>
+        <p:spPr>
+          <a:xfrm flipV="1">
+            <a:off x="4752753" y="1063256"/>
+            <a:ext cx="3306726" cy="1185530"/>
+          </a:xfrm>
+          <a:prstGeom prst="straightConnector1">
+            <a:avLst/>
+          </a:prstGeom>
+          <a:ln>
+            <a:tailEnd type="triangle"/>
+          </a:ln>
+        </p:spPr>
+        <p:style>
+          <a:lnRef idx="2">
+            <a:schemeClr val="accent1"/>
+          </a:lnRef>
+          <a:fillRef idx="0">
+            <a:schemeClr val="accent1"/>
+          </a:fillRef>
+          <a:effectRef idx="1">
+            <a:schemeClr val="accent1"/>
+          </a:effectRef>
+          <a:fontRef idx="minor">
+            <a:schemeClr val="tx1"/>
+          </a:fontRef>
+        </p:style>
+      </p:cxnSp>
+      <p:sp>
+        <p:nvSpPr>
+          <p:cNvPr id="14" name="CasellaDiTesto 13">
+            <a:extLst>
+              <a:ext uri="{FF2B5EF4-FFF2-40B4-BE49-F238E27FC236}">
+                <a16:creationId xmlns:a16="http://schemas.microsoft.com/office/drawing/2014/main" id="{1CFB9BB6-5C6A-B80A-5A90-4983D7507454}"/>
+              </a:ext>
+            </a:extLst>
+          </p:cNvPr>
+          <p:cNvSpPr txBox="1"/>
+          <p:nvPr/>
+        </p:nvSpPr>
+        <p:spPr>
+          <a:xfrm>
+            <a:off x="8203019" y="802758"/>
+            <a:ext cx="2408274" cy="1200329"/>
+          </a:xfrm>
+          <a:prstGeom prst="rect">
+            <a:avLst/>
+          </a:prstGeom>
+          <a:noFill/>
+        </p:spPr>
+        <p:txBody>
+          <a:bodyPr wrap="square" rtlCol="0">
+            <a:spAutoFit/>
+          </a:bodyPr>
+          <a:lstStyle/>
+          <a:p>
+            <a:r>
+              <a:rPr lang="it-IT" dirty="0"/>
+              <a:t>A – Alimentari (5)</a:t>
+            </a:r>
+          </a:p>
+          <a:p>
+            <a:r>
+              <a:rPr lang="it-IT" dirty="0"/>
+              <a:t>E – Edilizia (10)</a:t>
+            </a:r>
+          </a:p>
+          <a:p>
+            <a:r>
+              <a:rPr lang="it-IT" dirty="0"/>
+              <a:t>I – Informatica (22)</a:t>
+            </a:r>
+          </a:p>
+          <a:p>
+            <a:r>
+              <a:rPr lang="it-IT" dirty="0"/>
+              <a:t>L – Lusso (45)</a:t>
+            </a:r>
+          </a:p>
+        </p:txBody>
+      </p:sp>
+      <p:cxnSp>
+        <p:nvCxnSpPr>
+          <p:cNvPr id="16" name="Connettore 2 15">
+            <a:extLst>
+              <a:ext uri="{FF2B5EF4-FFF2-40B4-BE49-F238E27FC236}">
+                <a16:creationId xmlns:a16="http://schemas.microsoft.com/office/drawing/2014/main" id="{DCD6C1CF-D04A-B559-1168-B97C91B5347F}"/>
+              </a:ext>
+            </a:extLst>
+          </p:cNvPr>
+          <p:cNvCxnSpPr>
+            <a:cxnSpLocks/>
+          </p:cNvCxnSpPr>
+          <p:nvPr/>
+        </p:nvCxnSpPr>
+        <p:spPr>
+          <a:xfrm flipH="1">
+            <a:off x="7176977" y="2003087"/>
+            <a:ext cx="1796902" cy="2808146"/>
+          </a:xfrm>
+          <a:prstGeom prst="straightConnector1">
+            <a:avLst/>
+          </a:prstGeom>
+          <a:ln>
+            <a:tailEnd type="triangle"/>
+          </a:ln>
+        </p:spPr>
+        <p:style>
+          <a:lnRef idx="2">
+            <a:schemeClr val="accent1"/>
+          </a:lnRef>
+          <a:fillRef idx="0">
+            <a:schemeClr val="accent1"/>
+          </a:fillRef>
+          <a:effectRef idx="1">
+            <a:schemeClr val="accent1"/>
+          </a:effectRef>
+          <a:fontRef idx="minor">
+            <a:schemeClr val="tx1"/>
+          </a:fontRef>
+        </p:style>
+      </p:cxnSp>
+      <p:sp>
+        <p:nvSpPr>
+          <p:cNvPr id="18" name="CasellaDiTesto 17">
+            <a:extLst>
+              <a:ext uri="{FF2B5EF4-FFF2-40B4-BE49-F238E27FC236}">
+                <a16:creationId xmlns:a16="http://schemas.microsoft.com/office/drawing/2014/main" id="{40D2D8A5-AB3B-CC88-57AF-1FEE36A983DA}"/>
+              </a:ext>
+            </a:extLst>
+          </p:cNvPr>
+          <p:cNvSpPr txBox="1"/>
+          <p:nvPr/>
+        </p:nvSpPr>
+        <p:spPr>
+          <a:xfrm>
+            <a:off x="1430079" y="5651205"/>
+            <a:ext cx="9053623" cy="369332"/>
+          </a:xfrm>
+          <a:prstGeom prst="rect">
+            <a:avLst/>
+          </a:prstGeom>
+          <a:noFill/>
+        </p:spPr>
+        <p:txBody>
+          <a:bodyPr wrap="square" rtlCol="0">
+            <a:spAutoFit/>
+          </a:bodyPr>
+          <a:lstStyle/>
+          <a:p>
+            <a:r>
+              <a:rPr lang="it-IT" dirty="0"/>
+              <a:t>(</a:t>
+            </a:r>
+            <a:r>
+              <a:rPr lang="it-IT" dirty="0" err="1"/>
+              <a:t>Importounitario</a:t>
+            </a:r>
+            <a:r>
+              <a:rPr lang="it-IT" dirty="0"/>
+              <a:t> * numero pezzi) + (</a:t>
+            </a:r>
+            <a:r>
+              <a:rPr lang="it-IT" dirty="0" err="1"/>
+              <a:t>Importounitario</a:t>
+            </a:r>
+            <a:r>
+              <a:rPr lang="it-IT" dirty="0"/>
+              <a:t> * numero pezzi)  * iva /100</a:t>
+            </a:r>
+          </a:p>
+        </p:txBody>
+      </p:sp>
+      <p:cxnSp>
+        <p:nvCxnSpPr>
+          <p:cNvPr id="22" name="Connettore 2 21">
+            <a:extLst>
+              <a:ext uri="{FF2B5EF4-FFF2-40B4-BE49-F238E27FC236}">
+                <a16:creationId xmlns:a16="http://schemas.microsoft.com/office/drawing/2014/main" id="{65B109F7-5DE7-6EBE-AAE7-EF5C8AECF43B}"/>
+              </a:ext>
+            </a:extLst>
+          </p:cNvPr>
+          <p:cNvCxnSpPr/>
+          <p:nvPr/>
+        </p:nvCxnSpPr>
+        <p:spPr>
+          <a:xfrm flipH="1">
+            <a:off x="7889358" y="5052017"/>
+            <a:ext cx="2105247" cy="577923"/>
+          </a:xfrm>
+          <a:prstGeom prst="straightConnector1">
+            <a:avLst/>
+          </a:prstGeom>
+          <a:ln>
+            <a:tailEnd type="triangle"/>
+          </a:ln>
+        </p:spPr>
+        <p:style>
+          <a:lnRef idx="2">
+            <a:schemeClr val="accent1"/>
+          </a:lnRef>
+          <a:fillRef idx="0">
+            <a:schemeClr val="accent1"/>
+          </a:fillRef>
+          <a:effectRef idx="1">
+            <a:schemeClr val="accent1"/>
+          </a:effectRef>
+          <a:fontRef idx="minor">
+            <a:schemeClr val="tx1"/>
+          </a:fontRef>
+        </p:style>
+      </p:cxnSp>
+    </p:spTree>
+    <p:extLst>
+      <p:ext uri="{BB962C8B-B14F-4D97-AF65-F5344CB8AC3E}">
+        <p14:creationId xmlns:p14="http://schemas.microsoft.com/office/powerpoint/2010/main" val="1284871982"/>
+      </p:ext>
+    </p:extLst>
+  </p:cSld>
+  <p:clrMapOvr>
+    <a:masterClrMapping/>
+  </p:clrMapOvr>
+</p:sld>
+</file>
+
 <file path=ppt/slides/slide2.xml><?xml version="1.0" encoding="utf-8"?>
 <p:sld xmlns:a="http://schemas.openxmlformats.org/drawingml/2006/main" xmlns:r="http://schemas.openxmlformats.org/officeDocument/2006/relationships" xmlns:p="http://schemas.openxmlformats.org/presentationml/2006/main">
   <p:cSld>
@@ -6188,7 +7339,7 @@
         </p:nvSpPr>
         <p:spPr>
           <a:xfrm>
-            <a:off x="3625702" y="4476307"/>
+            <a:off x="3503428" y="4476307"/>
             <a:ext cx="5316279" cy="369332"/>
           </a:xfrm>
           <a:prstGeom prst="rect">

--- a/1404.pptx
+++ b/1404.pptx
@@ -19,6 +19,8 @@
     <p:sldId id="267" r:id="rId13"/>
     <p:sldId id="268" r:id="rId14"/>
     <p:sldId id="269" r:id="rId15"/>
+    <p:sldId id="271" r:id="rId16"/>
+    <p:sldId id="272" r:id="rId17"/>
   </p:sldIdLst>
   <p:sldSz cx="12192000" cy="6858000"/>
   <p:notesSz cx="6858000" cy="9144000"/>
@@ -117,6 +119,11 @@
       </a:defRPr>
     </a:lvl9pPr>
   </p:defaultTextStyle>
+  <p:extLst>
+    <p:ext uri="{EFAFB233-063F-42B5-8137-9DF3F51BA10A}">
+      <p15:sldGuideLst xmlns:p15="http://schemas.microsoft.com/office/powerpoint/2012/main"/>
+    </p:ext>
+  </p:extLst>
 </p:presentation>
 </file>
 
@@ -267,7 +274,7 @@
           <a:p>
             <a:fld id="{BACD91E9-B01F-49E7-81FC-2C24A1CD642E}" type="datetimeFigureOut">
               <a:rPr lang="it-IT" smtClean="0"/>
-              <a:t>14/04/2026</a:t>
+              <a:t>16/04/2026</a:t>
             </a:fld>
             <a:endParaRPr lang="it-IT"/>
           </a:p>
@@ -465,7 +472,7 @@
           <a:p>
             <a:fld id="{BACD91E9-B01F-49E7-81FC-2C24A1CD642E}" type="datetimeFigureOut">
               <a:rPr lang="it-IT" smtClean="0"/>
-              <a:t>14/04/2026</a:t>
+              <a:t>16/04/2026</a:t>
             </a:fld>
             <a:endParaRPr lang="it-IT"/>
           </a:p>
@@ -673,7 +680,7 @@
           <a:p>
             <a:fld id="{BACD91E9-B01F-49E7-81FC-2C24A1CD642E}" type="datetimeFigureOut">
               <a:rPr lang="it-IT" smtClean="0"/>
-              <a:t>14/04/2026</a:t>
+              <a:t>16/04/2026</a:t>
             </a:fld>
             <a:endParaRPr lang="it-IT"/>
           </a:p>
@@ -871,7 +878,7 @@
           <a:p>
             <a:fld id="{BACD91E9-B01F-49E7-81FC-2C24A1CD642E}" type="datetimeFigureOut">
               <a:rPr lang="it-IT" smtClean="0"/>
-              <a:t>14/04/2026</a:t>
+              <a:t>16/04/2026</a:t>
             </a:fld>
             <a:endParaRPr lang="it-IT"/>
           </a:p>
@@ -1146,7 +1153,7 @@
           <a:p>
             <a:fld id="{BACD91E9-B01F-49E7-81FC-2C24A1CD642E}" type="datetimeFigureOut">
               <a:rPr lang="it-IT" smtClean="0"/>
-              <a:t>14/04/2026</a:t>
+              <a:t>16/04/2026</a:t>
             </a:fld>
             <a:endParaRPr lang="it-IT"/>
           </a:p>
@@ -1411,7 +1418,7 @@
           <a:p>
             <a:fld id="{BACD91E9-B01F-49E7-81FC-2C24A1CD642E}" type="datetimeFigureOut">
               <a:rPr lang="it-IT" smtClean="0"/>
-              <a:t>14/04/2026</a:t>
+              <a:t>16/04/2026</a:t>
             </a:fld>
             <a:endParaRPr lang="it-IT"/>
           </a:p>
@@ -1823,7 +1830,7 @@
           <a:p>
             <a:fld id="{BACD91E9-B01F-49E7-81FC-2C24A1CD642E}" type="datetimeFigureOut">
               <a:rPr lang="it-IT" smtClean="0"/>
-              <a:t>14/04/2026</a:t>
+              <a:t>16/04/2026</a:t>
             </a:fld>
             <a:endParaRPr lang="it-IT"/>
           </a:p>
@@ -1964,7 +1971,7 @@
           <a:p>
             <a:fld id="{BACD91E9-B01F-49E7-81FC-2C24A1CD642E}" type="datetimeFigureOut">
               <a:rPr lang="it-IT" smtClean="0"/>
-              <a:t>14/04/2026</a:t>
+              <a:t>16/04/2026</a:t>
             </a:fld>
             <a:endParaRPr lang="it-IT"/>
           </a:p>
@@ -2077,7 +2084,7 @@
           <a:p>
             <a:fld id="{BACD91E9-B01F-49E7-81FC-2C24A1CD642E}" type="datetimeFigureOut">
               <a:rPr lang="it-IT" smtClean="0"/>
-              <a:t>14/04/2026</a:t>
+              <a:t>16/04/2026</a:t>
             </a:fld>
             <a:endParaRPr lang="it-IT"/>
           </a:p>
@@ -2388,7 +2395,7 @@
           <a:p>
             <a:fld id="{BACD91E9-B01F-49E7-81FC-2C24A1CD642E}" type="datetimeFigureOut">
               <a:rPr lang="it-IT" smtClean="0"/>
-              <a:t>14/04/2026</a:t>
+              <a:t>16/04/2026</a:t>
             </a:fld>
             <a:endParaRPr lang="it-IT"/>
           </a:p>
@@ -2676,7 +2683,7 @@
           <a:p>
             <a:fld id="{BACD91E9-B01F-49E7-81FC-2C24A1CD642E}" type="datetimeFigureOut">
               <a:rPr lang="it-IT" smtClean="0"/>
-              <a:t>14/04/2026</a:t>
+              <a:t>16/04/2026</a:t>
             </a:fld>
             <a:endParaRPr lang="it-IT"/>
           </a:p>
@@ -2917,7 +2924,7 @@
           <a:p>
             <a:fld id="{BACD91E9-B01F-49E7-81FC-2C24A1CD642E}" type="datetimeFigureOut">
               <a:rPr lang="it-IT" smtClean="0"/>
-              <a:t>14/04/2026</a:t>
+              <a:t>16/04/2026</a:t>
             </a:fld>
             <a:endParaRPr lang="it-IT"/>
           </a:p>
@@ -5105,6 +5112,1031 @@
     <p:extLst>
       <p:ext uri="{BB962C8B-B14F-4D97-AF65-F5344CB8AC3E}">
         <p14:creationId xmlns:p14="http://schemas.microsoft.com/office/powerpoint/2010/main" val="1284871982"/>
+      </p:ext>
+    </p:extLst>
+  </p:cSld>
+  <p:clrMapOvr>
+    <a:masterClrMapping/>
+  </p:clrMapOvr>
+</p:sld>
+</file>
+
+<file path=ppt/slides/slide15.xml><?xml version="1.0" encoding="utf-8"?>
+<p:sld xmlns:a="http://schemas.openxmlformats.org/drawingml/2006/main" xmlns:r="http://schemas.openxmlformats.org/officeDocument/2006/relationships" xmlns:p="http://schemas.openxmlformats.org/presentationml/2006/main">
+  <p:cSld>
+    <p:spTree>
+      <p:nvGrpSpPr>
+        <p:cNvPr id="1" name="">
+          <a:extLst>
+            <a:ext uri="{FF2B5EF4-FFF2-40B4-BE49-F238E27FC236}">
+              <a16:creationId xmlns:a16="http://schemas.microsoft.com/office/drawing/2014/main" id="{0B9BD5FF-AFEB-AB46-46BE-8119F07DE60B}"/>
+            </a:ext>
+          </a:extLst>
+        </p:cNvPr>
+        <p:cNvGrpSpPr/>
+        <p:nvPr/>
+      </p:nvGrpSpPr>
+      <p:grpSpPr>
+        <a:xfrm>
+          <a:off x="0" y="0"/>
+          <a:ext cx="0" cy="0"/>
+          <a:chOff x="0" y="0"/>
+          <a:chExt cx="0" cy="0"/>
+        </a:xfrm>
+      </p:grpSpPr>
+      <p:cxnSp>
+        <p:nvCxnSpPr>
+          <p:cNvPr id="5" name="Connettore diritto 4">
+            <a:extLst>
+              <a:ext uri="{FF2B5EF4-FFF2-40B4-BE49-F238E27FC236}">
+                <a16:creationId xmlns:a16="http://schemas.microsoft.com/office/drawing/2014/main" id="{9A3B90CD-284C-75B0-B341-AA609DE274F4}"/>
+              </a:ext>
+            </a:extLst>
+          </p:cNvPr>
+          <p:cNvCxnSpPr/>
+          <p:nvPr/>
+        </p:nvCxnSpPr>
+        <p:spPr>
+          <a:xfrm>
+            <a:off x="6416749" y="334926"/>
+            <a:ext cx="79744" cy="6140302"/>
+          </a:xfrm>
+          <a:prstGeom prst="line">
+            <a:avLst/>
+          </a:prstGeom>
+        </p:spPr>
+        <p:style>
+          <a:lnRef idx="2">
+            <a:schemeClr val="accent1"/>
+          </a:lnRef>
+          <a:fillRef idx="0">
+            <a:schemeClr val="accent1"/>
+          </a:fillRef>
+          <a:effectRef idx="1">
+            <a:schemeClr val="accent1"/>
+          </a:effectRef>
+          <a:fontRef idx="minor">
+            <a:schemeClr val="tx1"/>
+          </a:fontRef>
+        </p:style>
+      </p:cxnSp>
+      <p:sp>
+        <p:nvSpPr>
+          <p:cNvPr id="6" name="CasellaDiTesto 5">
+            <a:extLst>
+              <a:ext uri="{FF2B5EF4-FFF2-40B4-BE49-F238E27FC236}">
+                <a16:creationId xmlns:a16="http://schemas.microsoft.com/office/drawing/2014/main" id="{44AEBD64-1AD5-63DF-C70A-630CFCD8D7F2}"/>
+              </a:ext>
+            </a:extLst>
+          </p:cNvPr>
+          <p:cNvSpPr txBox="1"/>
+          <p:nvPr/>
+        </p:nvSpPr>
+        <p:spPr>
+          <a:xfrm>
+            <a:off x="7320515" y="265814"/>
+            <a:ext cx="4385931" cy="369332"/>
+          </a:xfrm>
+          <a:prstGeom prst="rect">
+            <a:avLst/>
+          </a:prstGeom>
+          <a:noFill/>
+        </p:spPr>
+        <p:txBody>
+          <a:bodyPr wrap="square" rtlCol="0">
+            <a:spAutoFit/>
+          </a:bodyPr>
+          <a:lstStyle/>
+          <a:p>
+            <a:r>
+              <a:rPr lang="it-IT" dirty="0"/>
+              <a:t>Utilizzatore degli oggetti (</a:t>
+            </a:r>
+            <a:r>
+              <a:rPr lang="it-IT" dirty="0" err="1"/>
+              <a:t>btn_inserisci</a:t>
+            </a:r>
+            <a:r>
+              <a:rPr lang="it-IT" dirty="0"/>
+              <a:t>)</a:t>
+            </a:r>
+          </a:p>
+        </p:txBody>
+      </p:sp>
+      <p:sp>
+        <p:nvSpPr>
+          <p:cNvPr id="7" name="CasellaDiTesto 6">
+            <a:extLst>
+              <a:ext uri="{FF2B5EF4-FFF2-40B4-BE49-F238E27FC236}">
+                <a16:creationId xmlns:a16="http://schemas.microsoft.com/office/drawing/2014/main" id="{C676BF9B-47E8-85EF-2EE5-808A720C6D3F}"/>
+              </a:ext>
+            </a:extLst>
+          </p:cNvPr>
+          <p:cNvSpPr txBox="1"/>
+          <p:nvPr/>
+        </p:nvSpPr>
+        <p:spPr>
+          <a:xfrm>
+            <a:off x="1380460" y="334926"/>
+            <a:ext cx="3880884" cy="369332"/>
+          </a:xfrm>
+          <a:prstGeom prst="rect">
+            <a:avLst/>
+          </a:prstGeom>
+          <a:noFill/>
+        </p:spPr>
+        <p:txBody>
+          <a:bodyPr wrap="square" rtlCol="0">
+            <a:spAutoFit/>
+          </a:bodyPr>
+          <a:lstStyle/>
+          <a:p>
+            <a:r>
+              <a:rPr lang="it-IT" dirty="0"/>
+              <a:t>Sviluppatore di classe</a:t>
+            </a:r>
+          </a:p>
+        </p:txBody>
+      </p:sp>
+      <p:sp>
+        <p:nvSpPr>
+          <p:cNvPr id="8" name="CasellaDiTesto 7">
+            <a:extLst>
+              <a:ext uri="{FF2B5EF4-FFF2-40B4-BE49-F238E27FC236}">
+                <a16:creationId xmlns:a16="http://schemas.microsoft.com/office/drawing/2014/main" id="{E5ADD38C-3619-2561-9BA4-B25A6D36FF71}"/>
+              </a:ext>
+            </a:extLst>
+          </p:cNvPr>
+          <p:cNvSpPr txBox="1"/>
+          <p:nvPr/>
+        </p:nvSpPr>
+        <p:spPr>
+          <a:xfrm>
+            <a:off x="6751674" y="866553"/>
+            <a:ext cx="4779335" cy="369332"/>
+          </a:xfrm>
+          <a:prstGeom prst="rect">
+            <a:avLst/>
+          </a:prstGeom>
+          <a:noFill/>
+        </p:spPr>
+        <p:txBody>
+          <a:bodyPr wrap="square" rtlCol="0">
+            <a:spAutoFit/>
+          </a:bodyPr>
+          <a:lstStyle/>
+          <a:p>
+            <a:r>
+              <a:rPr lang="it-IT" dirty="0"/>
+              <a:t>Oggetto.Metodo1();</a:t>
+            </a:r>
+          </a:p>
+        </p:txBody>
+      </p:sp>
+      <p:sp>
+        <p:nvSpPr>
+          <p:cNvPr id="2" name="CasellaDiTesto 1">
+            <a:extLst>
+              <a:ext uri="{FF2B5EF4-FFF2-40B4-BE49-F238E27FC236}">
+                <a16:creationId xmlns:a16="http://schemas.microsoft.com/office/drawing/2014/main" id="{9DA9024F-ECC4-5E39-9106-0A2470BD1042}"/>
+              </a:ext>
+            </a:extLst>
+          </p:cNvPr>
+          <p:cNvSpPr txBox="1"/>
+          <p:nvPr/>
+        </p:nvSpPr>
+        <p:spPr>
+          <a:xfrm>
+            <a:off x="536944" y="930349"/>
+            <a:ext cx="4146698" cy="1200329"/>
+          </a:xfrm>
+          <a:prstGeom prst="rect">
+            <a:avLst/>
+          </a:prstGeom>
+          <a:noFill/>
+        </p:spPr>
+        <p:txBody>
+          <a:bodyPr wrap="square" rtlCol="0">
+            <a:spAutoFit/>
+          </a:bodyPr>
+          <a:lstStyle/>
+          <a:p>
+            <a:r>
+              <a:rPr lang="it-IT" dirty="0"/>
+              <a:t>Public </a:t>
+            </a:r>
+            <a:r>
+              <a:rPr lang="it-IT" dirty="0" err="1"/>
+              <a:t>void</a:t>
+            </a:r>
+            <a:r>
+              <a:rPr lang="it-IT" dirty="0"/>
+              <a:t> metodo1(){</a:t>
+            </a:r>
+          </a:p>
+          <a:p>
+            <a:r>
+              <a:rPr lang="it-IT" dirty="0"/>
+              <a:t>	---</a:t>
+            </a:r>
+          </a:p>
+          <a:p>
+            <a:r>
+              <a:rPr lang="it-IT" dirty="0"/>
+              <a:t>	---</a:t>
+            </a:r>
+          </a:p>
+          <a:p>
+            <a:r>
+              <a:rPr lang="it-IT" dirty="0"/>
+              <a:t>}</a:t>
+            </a:r>
+          </a:p>
+        </p:txBody>
+      </p:sp>
+      <p:cxnSp>
+        <p:nvCxnSpPr>
+          <p:cNvPr id="4" name="Connettore 2 3">
+            <a:extLst>
+              <a:ext uri="{FF2B5EF4-FFF2-40B4-BE49-F238E27FC236}">
+                <a16:creationId xmlns:a16="http://schemas.microsoft.com/office/drawing/2014/main" id="{A7508BEA-4F63-E251-3210-5FEACF981529}"/>
+              </a:ext>
+            </a:extLst>
+          </p:cNvPr>
+          <p:cNvCxnSpPr>
+            <a:stCxn id="8" idx="1"/>
+          </p:cNvCxnSpPr>
+          <p:nvPr/>
+        </p:nvCxnSpPr>
+        <p:spPr>
+          <a:xfrm flipH="1">
+            <a:off x="2716619" y="1051219"/>
+            <a:ext cx="4035055" cy="495818"/>
+          </a:xfrm>
+          <a:prstGeom prst="straightConnector1">
+            <a:avLst/>
+          </a:prstGeom>
+          <a:ln>
+            <a:tailEnd type="triangle"/>
+          </a:ln>
+        </p:spPr>
+        <p:style>
+          <a:lnRef idx="2">
+            <a:schemeClr val="accent1"/>
+          </a:lnRef>
+          <a:fillRef idx="0">
+            <a:schemeClr val="accent1"/>
+          </a:fillRef>
+          <a:effectRef idx="1">
+            <a:schemeClr val="accent1"/>
+          </a:effectRef>
+          <a:fontRef idx="minor">
+            <a:schemeClr val="tx1"/>
+          </a:fontRef>
+        </p:style>
+      </p:cxnSp>
+      <p:sp>
+        <p:nvSpPr>
+          <p:cNvPr id="11" name="CasellaDiTesto 10">
+            <a:extLst>
+              <a:ext uri="{FF2B5EF4-FFF2-40B4-BE49-F238E27FC236}">
+                <a16:creationId xmlns:a16="http://schemas.microsoft.com/office/drawing/2014/main" id="{0C70A11F-0940-40BC-262D-07C7177D7ACB}"/>
+              </a:ext>
+            </a:extLst>
+          </p:cNvPr>
+          <p:cNvSpPr txBox="1"/>
+          <p:nvPr/>
+        </p:nvSpPr>
+        <p:spPr>
+          <a:xfrm>
+            <a:off x="6751674" y="2078664"/>
+            <a:ext cx="4699591" cy="369332"/>
+          </a:xfrm>
+          <a:prstGeom prst="rect">
+            <a:avLst/>
+          </a:prstGeom>
+          <a:noFill/>
+        </p:spPr>
+        <p:txBody>
+          <a:bodyPr wrap="square" rtlCol="0">
+            <a:spAutoFit/>
+          </a:bodyPr>
+          <a:lstStyle/>
+          <a:p>
+            <a:r>
+              <a:rPr lang="it-IT" dirty="0"/>
+              <a:t>Oggetto.Metodo2(valore1,valore2,…..);</a:t>
+            </a:r>
+          </a:p>
+        </p:txBody>
+      </p:sp>
+      <p:sp>
+        <p:nvSpPr>
+          <p:cNvPr id="12" name="CasellaDiTesto 11">
+            <a:extLst>
+              <a:ext uri="{FF2B5EF4-FFF2-40B4-BE49-F238E27FC236}">
+                <a16:creationId xmlns:a16="http://schemas.microsoft.com/office/drawing/2014/main" id="{87F5A636-93C9-8452-FFDE-B0ED5FE880EF}"/>
+              </a:ext>
+            </a:extLst>
+          </p:cNvPr>
+          <p:cNvSpPr txBox="1"/>
+          <p:nvPr/>
+        </p:nvSpPr>
+        <p:spPr>
+          <a:xfrm>
+            <a:off x="103667" y="2176613"/>
+            <a:ext cx="6352954" cy="1200329"/>
+          </a:xfrm>
+          <a:prstGeom prst="rect">
+            <a:avLst/>
+          </a:prstGeom>
+          <a:noFill/>
+        </p:spPr>
+        <p:txBody>
+          <a:bodyPr wrap="square" rtlCol="0">
+            <a:spAutoFit/>
+          </a:bodyPr>
+          <a:lstStyle/>
+          <a:p>
+            <a:r>
+              <a:rPr lang="it-IT" dirty="0"/>
+              <a:t>Public </a:t>
+            </a:r>
+            <a:r>
+              <a:rPr lang="it-IT" dirty="0" err="1"/>
+              <a:t>void</a:t>
+            </a:r>
+            <a:r>
+              <a:rPr lang="it-IT" dirty="0"/>
+              <a:t> metodo20(</a:t>
+            </a:r>
+            <a:r>
+              <a:rPr lang="it-IT" dirty="0" err="1"/>
+              <a:t>tipodato</a:t>
+            </a:r>
+            <a:r>
+              <a:rPr lang="it-IT" dirty="0"/>
+              <a:t> nomepar1,tipodato nomepar2){</a:t>
+            </a:r>
+          </a:p>
+          <a:p>
+            <a:r>
+              <a:rPr lang="it-IT" dirty="0"/>
+              <a:t>	---</a:t>
+            </a:r>
+          </a:p>
+          <a:p>
+            <a:r>
+              <a:rPr lang="it-IT" dirty="0"/>
+              <a:t>	----</a:t>
+            </a:r>
+          </a:p>
+          <a:p>
+            <a:r>
+              <a:rPr lang="it-IT" dirty="0"/>
+              <a:t>}</a:t>
+            </a:r>
+          </a:p>
+        </p:txBody>
+      </p:sp>
+      <p:cxnSp>
+        <p:nvCxnSpPr>
+          <p:cNvPr id="14" name="Connettore 2 13">
+            <a:extLst>
+              <a:ext uri="{FF2B5EF4-FFF2-40B4-BE49-F238E27FC236}">
+                <a16:creationId xmlns:a16="http://schemas.microsoft.com/office/drawing/2014/main" id="{FCD5650B-A386-2FCD-A241-6AA2EF04EA34}"/>
+              </a:ext>
+            </a:extLst>
+          </p:cNvPr>
+          <p:cNvCxnSpPr>
+            <a:stCxn id="11" idx="1"/>
+          </p:cNvCxnSpPr>
+          <p:nvPr/>
+        </p:nvCxnSpPr>
+        <p:spPr>
+          <a:xfrm flipH="1">
+            <a:off x="5608674" y="2263330"/>
+            <a:ext cx="1143000" cy="623410"/>
+          </a:xfrm>
+          <a:prstGeom prst="straightConnector1">
+            <a:avLst/>
+          </a:prstGeom>
+          <a:ln>
+            <a:tailEnd type="triangle"/>
+          </a:ln>
+        </p:spPr>
+        <p:style>
+          <a:lnRef idx="2">
+            <a:schemeClr val="accent1"/>
+          </a:lnRef>
+          <a:fillRef idx="0">
+            <a:schemeClr val="accent1"/>
+          </a:fillRef>
+          <a:effectRef idx="1">
+            <a:schemeClr val="accent1"/>
+          </a:effectRef>
+          <a:fontRef idx="minor">
+            <a:schemeClr val="tx1"/>
+          </a:fontRef>
+        </p:style>
+      </p:cxnSp>
+      <p:sp>
+        <p:nvSpPr>
+          <p:cNvPr id="15" name="CasellaDiTesto 14">
+            <a:extLst>
+              <a:ext uri="{FF2B5EF4-FFF2-40B4-BE49-F238E27FC236}">
+                <a16:creationId xmlns:a16="http://schemas.microsoft.com/office/drawing/2014/main" id="{4EC68635-899B-E630-E349-499AA48EF596}"/>
+              </a:ext>
+            </a:extLst>
+          </p:cNvPr>
+          <p:cNvSpPr txBox="1"/>
+          <p:nvPr/>
+        </p:nvSpPr>
+        <p:spPr>
+          <a:xfrm>
+            <a:off x="6847367" y="3059668"/>
+            <a:ext cx="3753294" cy="369332"/>
+          </a:xfrm>
+          <a:prstGeom prst="rect">
+            <a:avLst/>
+          </a:prstGeom>
+          <a:noFill/>
+        </p:spPr>
+        <p:txBody>
+          <a:bodyPr wrap="square" rtlCol="0">
+            <a:spAutoFit/>
+          </a:bodyPr>
+          <a:lstStyle/>
+          <a:p>
+            <a:r>
+              <a:rPr lang="it-IT" dirty="0"/>
+              <a:t>Variabile = Oggetto.Metodo3();</a:t>
+            </a:r>
+          </a:p>
+        </p:txBody>
+      </p:sp>
+      <p:sp>
+        <p:nvSpPr>
+          <p:cNvPr id="16" name="CasellaDiTesto 15">
+            <a:extLst>
+              <a:ext uri="{FF2B5EF4-FFF2-40B4-BE49-F238E27FC236}">
+                <a16:creationId xmlns:a16="http://schemas.microsoft.com/office/drawing/2014/main" id="{21462183-927B-3B57-5F37-AD97C2A73510}"/>
+              </a:ext>
+            </a:extLst>
+          </p:cNvPr>
+          <p:cNvSpPr txBox="1"/>
+          <p:nvPr/>
+        </p:nvSpPr>
+        <p:spPr>
+          <a:xfrm>
+            <a:off x="318977" y="3603033"/>
+            <a:ext cx="5397796" cy="1477328"/>
+          </a:xfrm>
+          <a:prstGeom prst="rect">
+            <a:avLst/>
+          </a:prstGeom>
+          <a:noFill/>
+        </p:spPr>
+        <p:txBody>
+          <a:bodyPr wrap="square" rtlCol="0">
+            <a:spAutoFit/>
+          </a:bodyPr>
+          <a:lstStyle/>
+          <a:p>
+            <a:r>
+              <a:rPr lang="it-IT" dirty="0"/>
+              <a:t>Public </a:t>
+            </a:r>
+            <a:r>
+              <a:rPr lang="it-IT" dirty="0" err="1"/>
+              <a:t>tipodidatodiritorno</a:t>
+            </a:r>
+            <a:r>
+              <a:rPr lang="it-IT" dirty="0"/>
+              <a:t> metodo3(){</a:t>
+            </a:r>
+          </a:p>
+          <a:p>
+            <a:r>
+              <a:rPr lang="it-IT" dirty="0"/>
+              <a:t>	---</a:t>
+            </a:r>
+          </a:p>
+          <a:p>
+            <a:r>
+              <a:rPr lang="it-IT" dirty="0"/>
+              <a:t>	---</a:t>
+            </a:r>
+          </a:p>
+          <a:p>
+            <a:r>
+              <a:rPr lang="it-IT" dirty="0"/>
+              <a:t>	</a:t>
+            </a:r>
+            <a:r>
+              <a:rPr lang="it-IT" dirty="0" err="1"/>
+              <a:t>return</a:t>
+            </a:r>
+            <a:r>
+              <a:rPr lang="it-IT" dirty="0"/>
+              <a:t> </a:t>
+            </a:r>
+            <a:r>
+              <a:rPr lang="it-IT" dirty="0" err="1"/>
+              <a:t>datodatornare</a:t>
+            </a:r>
+            <a:r>
+              <a:rPr lang="it-IT" dirty="0"/>
+              <a:t>;</a:t>
+            </a:r>
+          </a:p>
+          <a:p>
+            <a:r>
+              <a:rPr lang="it-IT" dirty="0"/>
+              <a:t>} </a:t>
+            </a:r>
+          </a:p>
+        </p:txBody>
+      </p:sp>
+      <p:cxnSp>
+        <p:nvCxnSpPr>
+          <p:cNvPr id="18" name="Connettore 2 17">
+            <a:extLst>
+              <a:ext uri="{FF2B5EF4-FFF2-40B4-BE49-F238E27FC236}">
+                <a16:creationId xmlns:a16="http://schemas.microsoft.com/office/drawing/2014/main" id="{C8B4279E-44A6-C412-7B17-67011BE82BA3}"/>
+              </a:ext>
+            </a:extLst>
+          </p:cNvPr>
+          <p:cNvCxnSpPr>
+            <a:cxnSpLocks/>
+          </p:cNvCxnSpPr>
+          <p:nvPr/>
+        </p:nvCxnSpPr>
+        <p:spPr>
+          <a:xfrm flipH="1">
+            <a:off x="4226442" y="3505359"/>
+            <a:ext cx="2716618" cy="834242"/>
+          </a:xfrm>
+          <a:prstGeom prst="straightConnector1">
+            <a:avLst/>
+          </a:prstGeom>
+          <a:ln>
+            <a:tailEnd type="triangle"/>
+          </a:ln>
+        </p:spPr>
+        <p:style>
+          <a:lnRef idx="2">
+            <a:schemeClr val="accent1"/>
+          </a:lnRef>
+          <a:fillRef idx="0">
+            <a:schemeClr val="accent1"/>
+          </a:fillRef>
+          <a:effectRef idx="1">
+            <a:schemeClr val="accent1"/>
+          </a:effectRef>
+          <a:fontRef idx="minor">
+            <a:schemeClr val="tx1"/>
+          </a:fontRef>
+        </p:style>
+      </p:cxnSp>
+      <p:sp>
+        <p:nvSpPr>
+          <p:cNvPr id="19" name="CasellaDiTesto 18">
+            <a:extLst>
+              <a:ext uri="{FF2B5EF4-FFF2-40B4-BE49-F238E27FC236}">
+                <a16:creationId xmlns:a16="http://schemas.microsoft.com/office/drawing/2014/main" id="{8D15A5AE-6BCA-56F6-BACF-86BD00D0A0D7}"/>
+              </a:ext>
+            </a:extLst>
+          </p:cNvPr>
+          <p:cNvSpPr txBox="1"/>
+          <p:nvPr/>
+        </p:nvSpPr>
+        <p:spPr>
+          <a:xfrm>
+            <a:off x="6930657" y="5167423"/>
+            <a:ext cx="5140842" cy="369332"/>
+          </a:xfrm>
+          <a:prstGeom prst="rect">
+            <a:avLst/>
+          </a:prstGeom>
+          <a:noFill/>
+        </p:spPr>
+        <p:txBody>
+          <a:bodyPr wrap="square" rtlCol="0">
+            <a:spAutoFit/>
+          </a:bodyPr>
+          <a:lstStyle/>
+          <a:p>
+            <a:r>
+              <a:rPr lang="it-IT" dirty="0"/>
+              <a:t>Variabile = oggetto.metodo4(valore1,valore2,….);</a:t>
+            </a:r>
+          </a:p>
+        </p:txBody>
+      </p:sp>
+      <p:sp>
+        <p:nvSpPr>
+          <p:cNvPr id="22" name="CasellaDiTesto 21">
+            <a:extLst>
+              <a:ext uri="{FF2B5EF4-FFF2-40B4-BE49-F238E27FC236}">
+                <a16:creationId xmlns:a16="http://schemas.microsoft.com/office/drawing/2014/main" id="{2C9E5C2A-D81B-B82A-181A-5AF45DFBFAAF}"/>
+              </a:ext>
+            </a:extLst>
+          </p:cNvPr>
+          <p:cNvSpPr txBox="1"/>
+          <p:nvPr/>
+        </p:nvSpPr>
+        <p:spPr>
+          <a:xfrm>
+            <a:off x="441251" y="5188987"/>
+            <a:ext cx="5397796" cy="1477328"/>
+          </a:xfrm>
+          <a:prstGeom prst="rect">
+            <a:avLst/>
+          </a:prstGeom>
+          <a:noFill/>
+        </p:spPr>
+        <p:txBody>
+          <a:bodyPr wrap="square" rtlCol="0">
+            <a:spAutoFit/>
+          </a:bodyPr>
+          <a:lstStyle/>
+          <a:p>
+            <a:r>
+              <a:rPr lang="it-IT" dirty="0"/>
+              <a:t>Public </a:t>
+            </a:r>
+            <a:r>
+              <a:rPr lang="it-IT" dirty="0" err="1"/>
+              <a:t>tipodidatodiritorno</a:t>
+            </a:r>
+            <a:r>
+              <a:rPr lang="it-IT" dirty="0"/>
+              <a:t> metodo4(</a:t>
+            </a:r>
+            <a:r>
+              <a:rPr lang="it-IT" dirty="0" err="1"/>
+              <a:t>tipodato</a:t>
+            </a:r>
+            <a:r>
+              <a:rPr lang="it-IT" dirty="0"/>
+              <a:t> par1,..){</a:t>
+            </a:r>
+          </a:p>
+          <a:p>
+            <a:r>
+              <a:rPr lang="it-IT" dirty="0"/>
+              <a:t>	---</a:t>
+            </a:r>
+          </a:p>
+          <a:p>
+            <a:r>
+              <a:rPr lang="it-IT" dirty="0"/>
+              <a:t>	---</a:t>
+            </a:r>
+          </a:p>
+          <a:p>
+            <a:r>
+              <a:rPr lang="it-IT" dirty="0"/>
+              <a:t>	</a:t>
+            </a:r>
+            <a:r>
+              <a:rPr lang="it-IT" dirty="0" err="1"/>
+              <a:t>return</a:t>
+            </a:r>
+            <a:r>
+              <a:rPr lang="it-IT" dirty="0"/>
+              <a:t> </a:t>
+            </a:r>
+            <a:r>
+              <a:rPr lang="it-IT" dirty="0" err="1"/>
+              <a:t>datodatornare</a:t>
+            </a:r>
+            <a:r>
+              <a:rPr lang="it-IT" dirty="0"/>
+              <a:t>;</a:t>
+            </a:r>
+          </a:p>
+          <a:p>
+            <a:r>
+              <a:rPr lang="it-IT" dirty="0"/>
+              <a:t>} </a:t>
+            </a:r>
+          </a:p>
+        </p:txBody>
+      </p:sp>
+      <p:cxnSp>
+        <p:nvCxnSpPr>
+          <p:cNvPr id="24" name="Connettore 2 23">
+            <a:extLst>
+              <a:ext uri="{FF2B5EF4-FFF2-40B4-BE49-F238E27FC236}">
+                <a16:creationId xmlns:a16="http://schemas.microsoft.com/office/drawing/2014/main" id="{DD1C7F30-8725-6BFB-9CFA-B3352488566D}"/>
+              </a:ext>
+            </a:extLst>
+          </p:cNvPr>
+          <p:cNvCxnSpPr>
+            <a:stCxn id="19" idx="1"/>
+          </p:cNvCxnSpPr>
+          <p:nvPr/>
+        </p:nvCxnSpPr>
+        <p:spPr>
+          <a:xfrm flipH="1">
+            <a:off x="5261344" y="5352089"/>
+            <a:ext cx="1669313" cy="575562"/>
+          </a:xfrm>
+          <a:prstGeom prst="straightConnector1">
+            <a:avLst/>
+          </a:prstGeom>
+          <a:ln>
+            <a:tailEnd type="triangle"/>
+          </a:ln>
+        </p:spPr>
+        <p:style>
+          <a:lnRef idx="2">
+            <a:schemeClr val="accent1"/>
+          </a:lnRef>
+          <a:fillRef idx="0">
+            <a:schemeClr val="accent1"/>
+          </a:fillRef>
+          <a:effectRef idx="1">
+            <a:schemeClr val="accent1"/>
+          </a:effectRef>
+          <a:fontRef idx="minor">
+            <a:schemeClr val="tx1"/>
+          </a:fontRef>
+        </p:style>
+      </p:cxnSp>
+      <p:cxnSp>
+        <p:nvCxnSpPr>
+          <p:cNvPr id="26" name="Connettore 2 25">
+            <a:extLst>
+              <a:ext uri="{FF2B5EF4-FFF2-40B4-BE49-F238E27FC236}">
+                <a16:creationId xmlns:a16="http://schemas.microsoft.com/office/drawing/2014/main" id="{C246C677-F1F0-2786-B1E7-A64F7D899648}"/>
+              </a:ext>
+            </a:extLst>
+          </p:cNvPr>
+          <p:cNvCxnSpPr>
+            <a:cxnSpLocks/>
+          </p:cNvCxnSpPr>
+          <p:nvPr/>
+        </p:nvCxnSpPr>
+        <p:spPr>
+          <a:xfrm>
+            <a:off x="9744740" y="2636874"/>
+            <a:ext cx="855921" cy="1285606"/>
+          </a:xfrm>
+          <a:prstGeom prst="straightConnector1">
+            <a:avLst/>
+          </a:prstGeom>
+          <a:ln>
+            <a:tailEnd type="triangle"/>
+          </a:ln>
+        </p:spPr>
+        <p:style>
+          <a:lnRef idx="2">
+            <a:schemeClr val="accent1"/>
+          </a:lnRef>
+          <a:fillRef idx="0">
+            <a:schemeClr val="accent1"/>
+          </a:fillRef>
+          <a:effectRef idx="1">
+            <a:schemeClr val="accent1"/>
+          </a:effectRef>
+          <a:fontRef idx="minor">
+            <a:schemeClr val="tx1"/>
+          </a:fontRef>
+        </p:style>
+      </p:cxnSp>
+      <p:cxnSp>
+        <p:nvCxnSpPr>
+          <p:cNvPr id="28" name="Connettore 2 27">
+            <a:extLst>
+              <a:ext uri="{FF2B5EF4-FFF2-40B4-BE49-F238E27FC236}">
+                <a16:creationId xmlns:a16="http://schemas.microsoft.com/office/drawing/2014/main" id="{15B4BB06-B5B7-DDAC-80CF-2AA83863A80D}"/>
+              </a:ext>
+            </a:extLst>
+          </p:cNvPr>
+          <p:cNvCxnSpPr>
+            <a:cxnSpLocks/>
+          </p:cNvCxnSpPr>
+          <p:nvPr/>
+        </p:nvCxnSpPr>
+        <p:spPr>
+          <a:xfrm flipH="1" flipV="1">
+            <a:off x="10600661" y="3936705"/>
+            <a:ext cx="58479" cy="986169"/>
+          </a:xfrm>
+          <a:prstGeom prst="straightConnector1">
+            <a:avLst/>
+          </a:prstGeom>
+          <a:ln>
+            <a:tailEnd type="triangle"/>
+          </a:ln>
+        </p:spPr>
+        <p:style>
+          <a:lnRef idx="2">
+            <a:schemeClr val="accent1"/>
+          </a:lnRef>
+          <a:fillRef idx="0">
+            <a:schemeClr val="accent1"/>
+          </a:fillRef>
+          <a:effectRef idx="1">
+            <a:schemeClr val="accent1"/>
+          </a:effectRef>
+          <a:fontRef idx="minor">
+            <a:schemeClr val="tx1"/>
+          </a:fontRef>
+        </p:style>
+      </p:cxnSp>
+      <p:sp>
+        <p:nvSpPr>
+          <p:cNvPr id="31" name="CasellaDiTesto 30">
+            <a:extLst>
+              <a:ext uri="{FF2B5EF4-FFF2-40B4-BE49-F238E27FC236}">
+                <a16:creationId xmlns:a16="http://schemas.microsoft.com/office/drawing/2014/main" id="{1E5F8E2F-8C5D-F739-20FB-021E4D9F84DD}"/>
+              </a:ext>
+            </a:extLst>
+          </p:cNvPr>
+          <p:cNvSpPr txBox="1"/>
+          <p:nvPr/>
+        </p:nvSpPr>
+        <p:spPr>
+          <a:xfrm>
+            <a:off x="8383772" y="3922480"/>
+            <a:ext cx="2057400" cy="369332"/>
+          </a:xfrm>
+          <a:prstGeom prst="rect">
+            <a:avLst/>
+          </a:prstGeom>
+          <a:noFill/>
+        </p:spPr>
+        <p:txBody>
+          <a:bodyPr wrap="square" rtlCol="0">
+            <a:spAutoFit/>
+          </a:bodyPr>
+          <a:lstStyle/>
+          <a:p>
+            <a:r>
+              <a:rPr lang="it-IT" dirty="0"/>
+              <a:t>Provvisti di firma</a:t>
+            </a:r>
+          </a:p>
+        </p:txBody>
+      </p:sp>
+    </p:spTree>
+    <p:extLst>
+      <p:ext uri="{BB962C8B-B14F-4D97-AF65-F5344CB8AC3E}">
+        <p14:creationId xmlns:p14="http://schemas.microsoft.com/office/powerpoint/2010/main" val="3441602308"/>
+      </p:ext>
+    </p:extLst>
+  </p:cSld>
+  <p:clrMapOvr>
+    <a:masterClrMapping/>
+  </p:clrMapOvr>
+</p:sld>
+</file>
+
+<file path=ppt/slides/slide16.xml><?xml version="1.0" encoding="utf-8"?>
+<p:sld xmlns:a="http://schemas.openxmlformats.org/drawingml/2006/main" xmlns:r="http://schemas.openxmlformats.org/officeDocument/2006/relationships" xmlns:p="http://schemas.openxmlformats.org/presentationml/2006/main">
+  <p:cSld>
+    <p:spTree>
+      <p:nvGrpSpPr>
+        <p:cNvPr id="1" name="">
+          <a:extLst>
+            <a:ext uri="{FF2B5EF4-FFF2-40B4-BE49-F238E27FC236}">
+              <a16:creationId xmlns:a16="http://schemas.microsoft.com/office/drawing/2014/main" id="{9D67B237-82BF-6214-E14C-22A442ACD653}"/>
+            </a:ext>
+          </a:extLst>
+        </p:cNvPr>
+        <p:cNvGrpSpPr/>
+        <p:nvPr/>
+      </p:nvGrpSpPr>
+      <p:grpSpPr>
+        <a:xfrm>
+          <a:off x="0" y="0"/>
+          <a:ext cx="0" cy="0"/>
+          <a:chOff x="0" y="0"/>
+          <a:chExt cx="0" cy="0"/>
+        </a:xfrm>
+      </p:grpSpPr>
+      <p:cxnSp>
+        <p:nvCxnSpPr>
+          <p:cNvPr id="5" name="Connettore diritto 4">
+            <a:extLst>
+              <a:ext uri="{FF2B5EF4-FFF2-40B4-BE49-F238E27FC236}">
+                <a16:creationId xmlns:a16="http://schemas.microsoft.com/office/drawing/2014/main" id="{E8D09172-955F-141D-8867-C1B1D8595444}"/>
+              </a:ext>
+            </a:extLst>
+          </p:cNvPr>
+          <p:cNvCxnSpPr/>
+          <p:nvPr/>
+        </p:nvCxnSpPr>
+        <p:spPr>
+          <a:xfrm>
+            <a:off x="6416749" y="334926"/>
+            <a:ext cx="79744" cy="6140302"/>
+          </a:xfrm>
+          <a:prstGeom prst="line">
+            <a:avLst/>
+          </a:prstGeom>
+        </p:spPr>
+        <p:style>
+          <a:lnRef idx="2">
+            <a:schemeClr val="accent1"/>
+          </a:lnRef>
+          <a:fillRef idx="0">
+            <a:schemeClr val="accent1"/>
+          </a:fillRef>
+          <a:effectRef idx="1">
+            <a:schemeClr val="accent1"/>
+          </a:effectRef>
+          <a:fontRef idx="minor">
+            <a:schemeClr val="tx1"/>
+          </a:fontRef>
+        </p:style>
+      </p:cxnSp>
+      <p:sp>
+        <p:nvSpPr>
+          <p:cNvPr id="6" name="CasellaDiTesto 5">
+            <a:extLst>
+              <a:ext uri="{FF2B5EF4-FFF2-40B4-BE49-F238E27FC236}">
+                <a16:creationId xmlns:a16="http://schemas.microsoft.com/office/drawing/2014/main" id="{74CF6680-7065-5D31-FEE3-602A5C64B934}"/>
+              </a:ext>
+            </a:extLst>
+          </p:cNvPr>
+          <p:cNvSpPr txBox="1"/>
+          <p:nvPr/>
+        </p:nvSpPr>
+        <p:spPr>
+          <a:xfrm>
+            <a:off x="7320515" y="265814"/>
+            <a:ext cx="4385931" cy="369332"/>
+          </a:xfrm>
+          <a:prstGeom prst="rect">
+            <a:avLst/>
+          </a:prstGeom>
+          <a:noFill/>
+        </p:spPr>
+        <p:txBody>
+          <a:bodyPr wrap="square" rtlCol="0">
+            <a:spAutoFit/>
+          </a:bodyPr>
+          <a:lstStyle/>
+          <a:p>
+            <a:r>
+              <a:rPr lang="it-IT" dirty="0"/>
+              <a:t>Utilizzatore degli oggetti (</a:t>
+            </a:r>
+            <a:r>
+              <a:rPr lang="it-IT" dirty="0" err="1"/>
+              <a:t>btn_inserisci</a:t>
+            </a:r>
+            <a:r>
+              <a:rPr lang="it-IT" dirty="0"/>
+              <a:t>)</a:t>
+            </a:r>
+          </a:p>
+        </p:txBody>
+      </p:sp>
+      <p:sp>
+        <p:nvSpPr>
+          <p:cNvPr id="7" name="CasellaDiTesto 6">
+            <a:extLst>
+              <a:ext uri="{FF2B5EF4-FFF2-40B4-BE49-F238E27FC236}">
+                <a16:creationId xmlns:a16="http://schemas.microsoft.com/office/drawing/2014/main" id="{B4E5A444-5277-33A3-1F00-7D117C2218E7}"/>
+              </a:ext>
+            </a:extLst>
+          </p:cNvPr>
+          <p:cNvSpPr txBox="1"/>
+          <p:nvPr/>
+        </p:nvSpPr>
+        <p:spPr>
+          <a:xfrm>
+            <a:off x="1380460" y="334926"/>
+            <a:ext cx="3880884" cy="369332"/>
+          </a:xfrm>
+          <a:prstGeom prst="rect">
+            <a:avLst/>
+          </a:prstGeom>
+          <a:noFill/>
+        </p:spPr>
+        <p:txBody>
+          <a:bodyPr wrap="square" rtlCol="0">
+            <a:spAutoFit/>
+          </a:bodyPr>
+          <a:lstStyle/>
+          <a:p>
+            <a:r>
+              <a:rPr lang="it-IT" dirty="0"/>
+              <a:t>Sviluppatore di classe</a:t>
+            </a:r>
+          </a:p>
+        </p:txBody>
+      </p:sp>
+    </p:spTree>
+    <p:extLst>
+      <p:ext uri="{BB962C8B-B14F-4D97-AF65-F5344CB8AC3E}">
+        <p14:creationId xmlns:p14="http://schemas.microsoft.com/office/powerpoint/2010/main" val="1704983454"/>
       </p:ext>
     </p:extLst>
   </p:cSld>

--- a/1404.pptx
+++ b/1404.pptx
@@ -17,10 +17,9 @@
     <p:sldId id="263" r:id="rId11"/>
     <p:sldId id="266" r:id="rId12"/>
     <p:sldId id="267" r:id="rId13"/>
-    <p:sldId id="268" r:id="rId14"/>
-    <p:sldId id="269" r:id="rId15"/>
-    <p:sldId id="271" r:id="rId16"/>
-    <p:sldId id="272" r:id="rId17"/>
+    <p:sldId id="269" r:id="rId14"/>
+    <p:sldId id="271" r:id="rId15"/>
+    <p:sldId id="272" r:id="rId16"/>
   </p:sldIdLst>
   <p:sldSz cx="12192000" cy="6858000"/>
   <p:notesSz cx="6858000" cy="9144000"/>
@@ -274,7 +273,7 @@
           <a:p>
             <a:fld id="{BACD91E9-B01F-49E7-81FC-2C24A1CD642E}" type="datetimeFigureOut">
               <a:rPr lang="it-IT" smtClean="0"/>
-              <a:t>16/04/2026</a:t>
+              <a:t>17/04/2026</a:t>
             </a:fld>
             <a:endParaRPr lang="it-IT"/>
           </a:p>
@@ -472,7 +471,7 @@
           <a:p>
             <a:fld id="{BACD91E9-B01F-49E7-81FC-2C24A1CD642E}" type="datetimeFigureOut">
               <a:rPr lang="it-IT" smtClean="0"/>
-              <a:t>16/04/2026</a:t>
+              <a:t>17/04/2026</a:t>
             </a:fld>
             <a:endParaRPr lang="it-IT"/>
           </a:p>
@@ -680,7 +679,7 @@
           <a:p>
             <a:fld id="{BACD91E9-B01F-49E7-81FC-2C24A1CD642E}" type="datetimeFigureOut">
               <a:rPr lang="it-IT" smtClean="0"/>
-              <a:t>16/04/2026</a:t>
+              <a:t>17/04/2026</a:t>
             </a:fld>
             <a:endParaRPr lang="it-IT"/>
           </a:p>
@@ -878,7 +877,7 @@
           <a:p>
             <a:fld id="{BACD91E9-B01F-49E7-81FC-2C24A1CD642E}" type="datetimeFigureOut">
               <a:rPr lang="it-IT" smtClean="0"/>
-              <a:t>16/04/2026</a:t>
+              <a:t>17/04/2026</a:t>
             </a:fld>
             <a:endParaRPr lang="it-IT"/>
           </a:p>
@@ -1153,7 +1152,7 @@
           <a:p>
             <a:fld id="{BACD91E9-B01F-49E7-81FC-2C24A1CD642E}" type="datetimeFigureOut">
               <a:rPr lang="it-IT" smtClean="0"/>
-              <a:t>16/04/2026</a:t>
+              <a:t>17/04/2026</a:t>
             </a:fld>
             <a:endParaRPr lang="it-IT"/>
           </a:p>
@@ -1418,7 +1417,7 @@
           <a:p>
             <a:fld id="{BACD91E9-B01F-49E7-81FC-2C24A1CD642E}" type="datetimeFigureOut">
               <a:rPr lang="it-IT" smtClean="0"/>
-              <a:t>16/04/2026</a:t>
+              <a:t>17/04/2026</a:t>
             </a:fld>
             <a:endParaRPr lang="it-IT"/>
           </a:p>
@@ -1830,7 +1829,7 @@
           <a:p>
             <a:fld id="{BACD91E9-B01F-49E7-81FC-2C24A1CD642E}" type="datetimeFigureOut">
               <a:rPr lang="it-IT" smtClean="0"/>
-              <a:t>16/04/2026</a:t>
+              <a:t>17/04/2026</a:t>
             </a:fld>
             <a:endParaRPr lang="it-IT"/>
           </a:p>
@@ -1971,7 +1970,7 @@
           <a:p>
             <a:fld id="{BACD91E9-B01F-49E7-81FC-2C24A1CD642E}" type="datetimeFigureOut">
               <a:rPr lang="it-IT" smtClean="0"/>
-              <a:t>16/04/2026</a:t>
+              <a:t>17/04/2026</a:t>
             </a:fld>
             <a:endParaRPr lang="it-IT"/>
           </a:p>
@@ -2084,7 +2083,7 @@
           <a:p>
             <a:fld id="{BACD91E9-B01F-49E7-81FC-2C24A1CD642E}" type="datetimeFigureOut">
               <a:rPr lang="it-IT" smtClean="0"/>
-              <a:t>16/04/2026</a:t>
+              <a:t>17/04/2026</a:t>
             </a:fld>
             <a:endParaRPr lang="it-IT"/>
           </a:p>
@@ -2395,7 +2394,7 @@
           <a:p>
             <a:fld id="{BACD91E9-B01F-49E7-81FC-2C24A1CD642E}" type="datetimeFigureOut">
               <a:rPr lang="it-IT" smtClean="0"/>
-              <a:t>16/04/2026</a:t>
+              <a:t>17/04/2026</a:t>
             </a:fld>
             <a:endParaRPr lang="it-IT"/>
           </a:p>
@@ -2683,7 +2682,7 @@
           <a:p>
             <a:fld id="{BACD91E9-B01F-49E7-81FC-2C24A1CD642E}" type="datetimeFigureOut">
               <a:rPr lang="it-IT" smtClean="0"/>
-              <a:t>16/04/2026</a:t>
+              <a:t>17/04/2026</a:t>
             </a:fld>
             <a:endParaRPr lang="it-IT"/>
           </a:p>
@@ -2924,7 +2923,7 @@
           <a:p>
             <a:fld id="{BACD91E9-B01F-49E7-81FC-2C24A1CD642E}" type="datetimeFigureOut">
               <a:rPr lang="it-IT" smtClean="0"/>
-              <a:t>16/04/2026</a:t>
+              <a:t>17/04/2026</a:t>
             </a:fld>
             <a:endParaRPr lang="it-IT"/>
           </a:p>
@@ -4436,36 +4435,6 @@
   <p:cSld>
     <p:spTree>
       <p:nvGrpSpPr>
-        <p:cNvPr id="1" name=""/>
-        <p:cNvGrpSpPr/>
-        <p:nvPr/>
-      </p:nvGrpSpPr>
-      <p:grpSpPr>
-        <a:xfrm>
-          <a:off x="0" y="0"/>
-          <a:ext cx="0" cy="0"/>
-          <a:chOff x="0" y="0"/>
-          <a:chExt cx="0" cy="0"/>
-        </a:xfrm>
-      </p:grpSpPr>
-    </p:spTree>
-    <p:extLst>
-      <p:ext uri="{BB962C8B-B14F-4D97-AF65-F5344CB8AC3E}">
-        <p14:creationId xmlns:p14="http://schemas.microsoft.com/office/powerpoint/2010/main" val="4064229652"/>
-      </p:ext>
-    </p:extLst>
-  </p:cSld>
-  <p:clrMapOvr>
-    <a:masterClrMapping/>
-  </p:clrMapOvr>
-</p:sld>
-</file>
-
-<file path=ppt/slides/slide14.xml><?xml version="1.0" encoding="utf-8"?>
-<p:sld xmlns:a="http://schemas.openxmlformats.org/drawingml/2006/main" xmlns:r="http://schemas.openxmlformats.org/officeDocument/2006/relationships" xmlns:p="http://schemas.openxmlformats.org/presentationml/2006/main">
-  <p:cSld>
-    <p:spTree>
-      <p:nvGrpSpPr>
         <p:cNvPr id="1" name="">
           <a:extLst>
             <a:ext uri="{FF2B5EF4-FFF2-40B4-BE49-F238E27FC236}">
@@ -5121,7 +5090,7 @@
 </p:sld>
 </file>
 
-<file path=ppt/slides/slide15.xml><?xml version="1.0" encoding="utf-8"?>
+<file path=ppt/slides/slide14.xml><?xml version="1.0" encoding="utf-8"?>
 <p:sld xmlns:a="http://schemas.openxmlformats.org/drawingml/2006/main" xmlns:r="http://schemas.openxmlformats.org/officeDocument/2006/relationships" xmlns:p="http://schemas.openxmlformats.org/presentationml/2006/main">
   <p:cSld>
     <p:spTree>
@@ -5996,18 +5965,12 @@
 </p:sld>
 </file>
 
-<file path=ppt/slides/slide16.xml><?xml version="1.0" encoding="utf-8"?>
+<file path=ppt/slides/slide15.xml><?xml version="1.0" encoding="utf-8"?>
 <p:sld xmlns:a="http://schemas.openxmlformats.org/drawingml/2006/main" xmlns:r="http://schemas.openxmlformats.org/officeDocument/2006/relationships" xmlns:p="http://schemas.openxmlformats.org/presentationml/2006/main">
   <p:cSld>
     <p:spTree>
       <p:nvGrpSpPr>
-        <p:cNvPr id="1" name="">
-          <a:extLst>
-            <a:ext uri="{FF2B5EF4-FFF2-40B4-BE49-F238E27FC236}">
-              <a16:creationId xmlns:a16="http://schemas.microsoft.com/office/drawing/2014/main" id="{9D67B237-82BF-6214-E14C-22A442ACD653}"/>
-            </a:ext>
-          </a:extLst>
-        </p:cNvPr>
+        <p:cNvPr id="1" name=""/>
         <p:cNvGrpSpPr/>
         <p:nvPr/>
       </p:nvGrpSpPr>
@@ -6019,26 +5982,115 @@
           <a:chExt cx="0" cy="0"/>
         </a:xfrm>
       </p:grpSpPr>
+      <p:sp>
+        <p:nvSpPr>
+          <p:cNvPr id="4" name="CasellaDiTesto 3">
+            <a:extLst>
+              <a:ext uri="{FF2B5EF4-FFF2-40B4-BE49-F238E27FC236}">
+                <a16:creationId xmlns:a16="http://schemas.microsoft.com/office/drawing/2014/main" id="{1A775C45-832B-0171-4FCD-2A9D4B764850}"/>
+              </a:ext>
+            </a:extLst>
+          </p:cNvPr>
+          <p:cNvSpPr txBox="1"/>
+          <p:nvPr/>
+        </p:nvSpPr>
+        <p:spPr>
+          <a:xfrm>
+            <a:off x="951614" y="813391"/>
+            <a:ext cx="2068033" cy="369332"/>
+          </a:xfrm>
+          <a:prstGeom prst="rect">
+            <a:avLst/>
+          </a:prstGeom>
+          <a:noFill/>
+        </p:spPr>
+        <p:txBody>
+          <a:bodyPr wrap="square" rtlCol="0">
+            <a:spAutoFit/>
+          </a:bodyPr>
+          <a:lstStyle/>
+          <a:p>
+            <a:r>
+              <a:rPr lang="it-IT" dirty="0"/>
+              <a:t>penna1</a:t>
+            </a:r>
+          </a:p>
+        </p:txBody>
+      </p:sp>
+      <p:sp>
+        <p:nvSpPr>
+          <p:cNvPr id="5" name="Ovale 4">
+            <a:extLst>
+              <a:ext uri="{FF2B5EF4-FFF2-40B4-BE49-F238E27FC236}">
+                <a16:creationId xmlns:a16="http://schemas.microsoft.com/office/drawing/2014/main" id="{7F89207C-87CC-5C6F-591C-C5CCC3ECA34F}"/>
+              </a:ext>
+            </a:extLst>
+          </p:cNvPr>
+          <p:cNvSpPr/>
+          <p:nvPr/>
+        </p:nvSpPr>
+        <p:spPr>
+          <a:xfrm>
+            <a:off x="4678326" y="1621465"/>
+            <a:ext cx="2854841" cy="1206795"/>
+          </a:xfrm>
+          <a:prstGeom prst="ellipse">
+            <a:avLst/>
+          </a:prstGeom>
+        </p:spPr>
+        <p:style>
+          <a:lnRef idx="2">
+            <a:schemeClr val="accent1">
+              <a:shade val="15000"/>
+            </a:schemeClr>
+          </a:lnRef>
+          <a:fillRef idx="1">
+            <a:schemeClr val="accent1"/>
+          </a:fillRef>
+          <a:effectRef idx="0">
+            <a:schemeClr val="accent1"/>
+          </a:effectRef>
+          <a:fontRef idx="minor">
+            <a:schemeClr val="lt1"/>
+          </a:fontRef>
+        </p:style>
+        <p:txBody>
+          <a:bodyPr rtlCol="0" anchor="ctr"/>
+          <a:lstStyle/>
+          <a:p>
+            <a:pPr algn="ctr"/>
+            <a:r>
+              <a:rPr lang="it-IT" dirty="0"/>
+              <a:t>aed23eee4a</a:t>
+            </a:r>
+          </a:p>
+        </p:txBody>
+      </p:sp>
       <p:cxnSp>
         <p:nvCxnSpPr>
-          <p:cNvPr id="5" name="Connettore diritto 4">
-            <a:extLst>
-              <a:ext uri="{FF2B5EF4-FFF2-40B4-BE49-F238E27FC236}">
-                <a16:creationId xmlns:a16="http://schemas.microsoft.com/office/drawing/2014/main" id="{E8D09172-955F-141D-8867-C1B1D8595444}"/>
-              </a:ext>
-            </a:extLst>
-          </p:cNvPr>
-          <p:cNvCxnSpPr/>
+          <p:cNvPr id="7" name="Connettore 2 6">
+            <a:extLst>
+              <a:ext uri="{FF2B5EF4-FFF2-40B4-BE49-F238E27FC236}">
+                <a16:creationId xmlns:a16="http://schemas.microsoft.com/office/drawing/2014/main" id="{B8FA7D84-BC37-D2F6-70D3-29F9A02A1601}"/>
+              </a:ext>
+            </a:extLst>
+          </p:cNvPr>
+          <p:cNvCxnSpPr>
+            <a:endCxn id="5" idx="2"/>
+          </p:cNvCxnSpPr>
           <p:nvPr/>
         </p:nvCxnSpPr>
         <p:spPr>
           <a:xfrm>
-            <a:off x="6416749" y="334926"/>
-            <a:ext cx="79744" cy="6140302"/>
-          </a:xfrm>
-          <a:prstGeom prst="line">
-            <a:avLst/>
-          </a:prstGeom>
+            <a:off x="1759688" y="1047307"/>
+            <a:ext cx="2918638" cy="1177556"/>
+          </a:xfrm>
+          <a:prstGeom prst="straightConnector1">
+            <a:avLst/>
+          </a:prstGeom>
+          <a:ln>
+            <a:tailEnd type="triangle"/>
+          </a:ln>
         </p:spPr>
         <p:style>
           <a:lnRef idx="2">
@@ -6057,10 +6109,10 @@
       </p:cxnSp>
       <p:sp>
         <p:nvSpPr>
-          <p:cNvPr id="6" name="CasellaDiTesto 5">
-            <a:extLst>
-              <a:ext uri="{FF2B5EF4-FFF2-40B4-BE49-F238E27FC236}">
-                <a16:creationId xmlns:a16="http://schemas.microsoft.com/office/drawing/2014/main" id="{74CF6680-7065-5D31-FEE3-602A5C64B934}"/>
+          <p:cNvPr id="8" name="CasellaDiTesto 7">
+            <a:extLst>
+              <a:ext uri="{FF2B5EF4-FFF2-40B4-BE49-F238E27FC236}">
+                <a16:creationId xmlns:a16="http://schemas.microsoft.com/office/drawing/2014/main" id="{799BECA5-880F-164C-2D43-46A4E6B691B3}"/>
               </a:ext>
             </a:extLst>
           </p:cNvPr>
@@ -6069,8 +6121,8 @@
         </p:nvSpPr>
         <p:spPr>
           <a:xfrm>
-            <a:off x="7320515" y="265814"/>
-            <a:ext cx="4385931" cy="369332"/>
+            <a:off x="855921" y="2224863"/>
+            <a:ext cx="1935126" cy="369332"/>
           </a:xfrm>
           <a:prstGeom prst="rect">
             <a:avLst/>
@@ -6085,25 +6137,58 @@
           <a:p>
             <a:r>
               <a:rPr lang="it-IT" dirty="0"/>
-              <a:t>Utilizzatore degli oggetti (</a:t>
-            </a:r>
-            <a:r>
-              <a:rPr lang="it-IT" dirty="0" err="1"/>
-              <a:t>btn_inserisci</a:t>
-            </a:r>
-            <a:r>
-              <a:rPr lang="it-IT" dirty="0"/>
-              <a:t>)</a:t>
-            </a:r>
-          </a:p>
-        </p:txBody>
-      </p:sp>
-      <p:sp>
-        <p:nvSpPr>
-          <p:cNvPr id="7" name="CasellaDiTesto 6">
-            <a:extLst>
-              <a:ext uri="{FF2B5EF4-FFF2-40B4-BE49-F238E27FC236}">
-                <a16:creationId xmlns:a16="http://schemas.microsoft.com/office/drawing/2014/main" id="{B4E5A444-5277-33A3-1F00-7D117C2218E7}"/>
+              <a:t>Penna2=penna1</a:t>
+            </a:r>
+          </a:p>
+        </p:txBody>
+      </p:sp>
+      <p:cxnSp>
+        <p:nvCxnSpPr>
+          <p:cNvPr id="10" name="Connettore 2 9">
+            <a:extLst>
+              <a:ext uri="{FF2B5EF4-FFF2-40B4-BE49-F238E27FC236}">
+                <a16:creationId xmlns:a16="http://schemas.microsoft.com/office/drawing/2014/main" id="{E10C7341-15F2-E1EE-15FE-9FD9B1702112}"/>
+              </a:ext>
+            </a:extLst>
+          </p:cNvPr>
+          <p:cNvCxnSpPr>
+            <a:stCxn id="5" idx="3"/>
+          </p:cNvCxnSpPr>
+          <p:nvPr/>
+        </p:nvCxnSpPr>
+        <p:spPr>
+          <a:xfrm flipH="1">
+            <a:off x="2838893" y="2651529"/>
+            <a:ext cx="2257515" cy="1521750"/>
+          </a:xfrm>
+          <a:prstGeom prst="straightConnector1">
+            <a:avLst/>
+          </a:prstGeom>
+          <a:ln>
+            <a:tailEnd type="triangle"/>
+          </a:ln>
+        </p:spPr>
+        <p:style>
+          <a:lnRef idx="2">
+            <a:schemeClr val="accent1"/>
+          </a:lnRef>
+          <a:fillRef idx="0">
+            <a:schemeClr val="accent1"/>
+          </a:fillRef>
+          <a:effectRef idx="1">
+            <a:schemeClr val="accent1"/>
+          </a:effectRef>
+          <a:fontRef idx="minor">
+            <a:schemeClr val="tx1"/>
+          </a:fontRef>
+        </p:style>
+      </p:cxnSp>
+      <p:sp>
+        <p:nvSpPr>
+          <p:cNvPr id="11" name="CasellaDiTesto 10">
+            <a:extLst>
+              <a:ext uri="{FF2B5EF4-FFF2-40B4-BE49-F238E27FC236}">
+                <a16:creationId xmlns:a16="http://schemas.microsoft.com/office/drawing/2014/main" id="{01D000BB-2284-81B5-E613-7D2F5A9919D9}"/>
               </a:ext>
             </a:extLst>
           </p:cNvPr>
@@ -6112,8 +6197,8 @@
         </p:nvSpPr>
         <p:spPr>
           <a:xfrm>
-            <a:off x="1380460" y="334926"/>
-            <a:ext cx="3880884" cy="369332"/>
+            <a:off x="1759688" y="4263806"/>
+            <a:ext cx="1031359" cy="371989"/>
           </a:xfrm>
           <a:prstGeom prst="rect">
             <a:avLst/>
@@ -6128,7 +6213,7 @@
           <a:p>
             <a:r>
               <a:rPr lang="it-IT" dirty="0"/>
-              <a:t>Sviluppatore di classe</a:t>
+              <a:t>penna2</a:t>
             </a:r>
           </a:p>
         </p:txBody>
@@ -6136,7 +6221,7 @@
     </p:spTree>
     <p:extLst>
       <p:ext uri="{BB962C8B-B14F-4D97-AF65-F5344CB8AC3E}">
-        <p14:creationId xmlns:p14="http://schemas.microsoft.com/office/powerpoint/2010/main" val="1704983454"/>
+        <p14:creationId xmlns:p14="http://schemas.microsoft.com/office/powerpoint/2010/main" val="3205595047"/>
       </p:ext>
     </p:extLst>
   </p:cSld>
@@ -8887,7 +8972,7 @@
         <p:spPr>
           <a:xfrm>
             <a:off x="632637" y="1493874"/>
-            <a:ext cx="4970721" cy="1200329"/>
+            <a:ext cx="6049926" cy="1754326"/>
           </a:xfrm>
           <a:prstGeom prst="rect">
             <a:avLst/>
@@ -8905,7 +8990,7 @@
               <a:buChar char="•"/>
             </a:pPr>
             <a:r>
-              <a:rPr lang="it-IT" dirty="0"/>
+              <a:rPr lang="it-IT" b="1" dirty="0"/>
               <a:t>ASTRAZIONE</a:t>
             </a:r>
           </a:p>
@@ -8915,7 +9000,7 @@
               <a:buChar char="•"/>
             </a:pPr>
             <a:r>
-              <a:rPr lang="it-IT" dirty="0"/>
+              <a:rPr lang="it-IT" b="1" dirty="0"/>
               <a:t>INCAPSULAMENTO (HIDING INFORMATION)</a:t>
             </a:r>
           </a:p>
@@ -8936,9 +9021,31 @@
               <a:buChar char="•"/>
             </a:pPr>
             <a:r>
-              <a:rPr lang="it-IT" dirty="0"/>
+              <a:rPr lang="it-IT" b="1" dirty="0"/>
               <a:t>POLIMORFISMO</a:t>
             </a:r>
+          </a:p>
+          <a:p>
+            <a:pPr marL="742950" lvl="1" indent="-285750">
+              <a:buFont typeface="Courier New" panose="02070309020205020404" pitchFamily="49" charset="0"/>
+              <a:buChar char="o"/>
+            </a:pPr>
+            <a:r>
+              <a:rPr lang="it-IT" b="1" dirty="0" err="1"/>
+              <a:t>Overloading</a:t>
+            </a:r>
+            <a:endParaRPr lang="it-IT" b="1" dirty="0"/>
+          </a:p>
+          <a:p>
+            <a:pPr marL="742950" lvl="1" indent="-285750">
+              <a:buFont typeface="Courier New" panose="02070309020205020404" pitchFamily="49" charset="0"/>
+              <a:buChar char="o"/>
+            </a:pPr>
+            <a:r>
+              <a:rPr lang="it-IT" u="sng" dirty="0" err="1"/>
+              <a:t>Overriding</a:t>
+            </a:r>
+            <a:endParaRPr lang="it-IT" u="sng" dirty="0"/>
           </a:p>
         </p:txBody>
       </p:sp>

--- a/1404.pptx
+++ b/1404.pptx
@@ -9010,10 +9010,10 @@
               <a:buChar char="•"/>
             </a:pPr>
             <a:r>
-              <a:rPr lang="it-IT" dirty="0" err="1"/>
+              <a:rPr lang="it-IT" b="1" dirty="0" err="1"/>
               <a:t>EREDITARIETà</a:t>
             </a:r>
-            <a:endParaRPr lang="it-IT" dirty="0"/>
+            <a:endParaRPr lang="it-IT" b="1" dirty="0"/>
           </a:p>
           <a:p>
             <a:pPr marL="285750" indent="-285750">
